--- a/cours/Module TIC/Série Officielle 01-10/Cours_TIC_08_World_Wide_Web_FR.pptx
+++ b/cours/Module TIC/Série Officielle 01-10/Cours_TIC_08_World_Wide_Web_FR.pptx
@@ -2856,7 +2856,7 @@
           <a:solidFill>
             <a:schemeClr val="tx1"/>
           </a:solidFill>
-          <a:latin typeface="+mj-lt"/>
+          <a:latin typeface="Poppins"/>
           <a:ea typeface="+mj-ea"/>
           <a:cs typeface="+mj-cs"/>
         </a:defRPr>
@@ -2873,7 +2873,7 @@
           <a:solidFill>
             <a:schemeClr val="tx1"/>
           </a:solidFill>
-          <a:latin typeface="+mn-lt"/>
+          <a:latin typeface="Poppins"/>
           <a:ea typeface="+mn-ea"/>
           <a:cs typeface="+mn-cs"/>
         </a:defRPr>
@@ -2888,7 +2888,7 @@
           <a:solidFill>
             <a:schemeClr val="tx1"/>
           </a:solidFill>
-          <a:latin typeface="+mn-lt"/>
+          <a:latin typeface="Poppins"/>
           <a:ea typeface="+mn-ea"/>
           <a:cs typeface="+mn-cs"/>
         </a:defRPr>
@@ -2903,7 +2903,7 @@
           <a:solidFill>
             <a:schemeClr val="tx1"/>
           </a:solidFill>
-          <a:latin typeface="+mn-lt"/>
+          <a:latin typeface="Poppins"/>
           <a:ea typeface="+mn-ea"/>
           <a:cs typeface="+mn-cs"/>
         </a:defRPr>
@@ -2918,7 +2918,7 @@
           <a:solidFill>
             <a:schemeClr val="tx1"/>
           </a:solidFill>
-          <a:latin typeface="+mn-lt"/>
+          <a:latin typeface="Poppins"/>
           <a:ea typeface="+mn-ea"/>
           <a:cs typeface="+mn-cs"/>
         </a:defRPr>
@@ -2933,7 +2933,7 @@
           <a:solidFill>
             <a:schemeClr val="tx1"/>
           </a:solidFill>
-          <a:latin typeface="+mn-lt"/>
+          <a:latin typeface="Poppins"/>
           <a:ea typeface="+mn-ea"/>
           <a:cs typeface="+mn-cs"/>
         </a:defRPr>
@@ -2948,7 +2948,7 @@
           <a:solidFill>
             <a:schemeClr val="tx1"/>
           </a:solidFill>
-          <a:latin typeface="+mn-lt"/>
+          <a:latin typeface="Poppins"/>
           <a:ea typeface="+mn-ea"/>
           <a:cs typeface="+mn-cs"/>
         </a:defRPr>
@@ -2963,7 +2963,7 @@
           <a:solidFill>
             <a:schemeClr val="tx1"/>
           </a:solidFill>
-          <a:latin typeface="+mn-lt"/>
+          <a:latin typeface="Poppins"/>
           <a:ea typeface="+mn-ea"/>
           <a:cs typeface="+mn-cs"/>
         </a:defRPr>
@@ -2978,7 +2978,7 @@
           <a:solidFill>
             <a:schemeClr val="tx1"/>
           </a:solidFill>
-          <a:latin typeface="+mn-lt"/>
+          <a:latin typeface="Poppins"/>
           <a:ea typeface="+mn-ea"/>
           <a:cs typeface="+mn-cs"/>
         </a:defRPr>
@@ -2993,7 +2993,7 @@
           <a:solidFill>
             <a:schemeClr val="tx1"/>
           </a:solidFill>
-          <a:latin typeface="+mn-lt"/>
+          <a:latin typeface="Poppins"/>
           <a:ea typeface="+mn-ea"/>
           <a:cs typeface="+mn-cs"/>
         </a:defRPr>
@@ -3008,7 +3008,7 @@
           <a:solidFill>
             <a:schemeClr val="tx1"/>
           </a:solidFill>
-          <a:latin typeface="+mn-lt"/>
+          <a:latin typeface="Poppins"/>
           <a:ea typeface="+mn-ea"/>
           <a:cs typeface="+mn-cs"/>
         </a:defRPr>
@@ -3018,7 +3018,7 @@
           <a:solidFill>
             <a:schemeClr val="tx1"/>
           </a:solidFill>
-          <a:latin typeface="+mn-lt"/>
+          <a:latin typeface="Poppins"/>
           <a:ea typeface="+mn-ea"/>
           <a:cs typeface="+mn-cs"/>
         </a:defRPr>
@@ -3028,7 +3028,7 @@
           <a:solidFill>
             <a:schemeClr val="tx1"/>
           </a:solidFill>
-          <a:latin typeface="+mn-lt"/>
+          <a:latin typeface="Poppins"/>
           <a:ea typeface="+mn-ea"/>
           <a:cs typeface="+mn-cs"/>
         </a:defRPr>
@@ -3038,7 +3038,7 @@
           <a:solidFill>
             <a:schemeClr val="tx1"/>
           </a:solidFill>
-          <a:latin typeface="+mn-lt"/>
+          <a:latin typeface="Poppins"/>
           <a:ea typeface="+mn-ea"/>
           <a:cs typeface="+mn-cs"/>
         </a:defRPr>
@@ -3048,7 +3048,7 @@
           <a:solidFill>
             <a:schemeClr val="tx1"/>
           </a:solidFill>
-          <a:latin typeface="+mn-lt"/>
+          <a:latin typeface="Poppins"/>
           <a:ea typeface="+mn-ea"/>
           <a:cs typeface="+mn-cs"/>
         </a:defRPr>
@@ -3058,7 +3058,7 @@
           <a:solidFill>
             <a:schemeClr val="tx1"/>
           </a:solidFill>
-          <a:latin typeface="+mn-lt"/>
+          <a:latin typeface="Poppins"/>
           <a:ea typeface="+mn-ea"/>
           <a:cs typeface="+mn-cs"/>
         </a:defRPr>
@@ -3068,7 +3068,7 @@
           <a:solidFill>
             <a:schemeClr val="tx1"/>
           </a:solidFill>
-          <a:latin typeface="+mn-lt"/>
+          <a:latin typeface="Poppins"/>
           <a:ea typeface="+mn-ea"/>
           <a:cs typeface="+mn-cs"/>
         </a:defRPr>
@@ -3078,7 +3078,7 @@
           <a:solidFill>
             <a:schemeClr val="tx1"/>
           </a:solidFill>
-          <a:latin typeface="+mn-lt"/>
+          <a:latin typeface="Poppins"/>
           <a:ea typeface="+mn-ea"/>
           <a:cs typeface="+mn-cs"/>
         </a:defRPr>
@@ -3088,7 +3088,7 @@
           <a:solidFill>
             <a:schemeClr val="tx1"/>
           </a:solidFill>
-          <a:latin typeface="+mn-lt"/>
+          <a:latin typeface="Poppins"/>
           <a:ea typeface="+mn-ea"/>
           <a:cs typeface="+mn-cs"/>
         </a:defRPr>
@@ -3103,9 +3103,7 @@
   <p:cSld>
     <p:bg>
       <p:bgPr>
-        <a:solidFill>
-          <a:srgbClr val="0B3D2E"/>
-        </a:solidFill>
+        <a:solidFill>val="004A38"/&gt;</a:solidFill>
         <a:effectLst/>
       </p:bgPr>
     </p:bg>
@@ -3130,9 +3128,7 @@
           <a:prstGeom prst="rect">
             <a:avLst/>
           </a:prstGeom>
-          <a:solidFill>
-            <a:srgbClr val="146B4A"/>
-          </a:solidFill>
+          <a:solidFill>val="007A55"/&gt;</a:solidFill>
           <a:ln>
             <a:noFill/>
           </a:ln>
@@ -3174,9 +3170,7 @@
           <a:prstGeom prst="rect">
             <a:avLst/>
           </a:prstGeom>
-          <a:solidFill>
-            <a:srgbClr val="FFD700"/>
-          </a:solidFill>
+          <a:solidFill>val="F0B429"/&gt;</a:solidFill>
           <a:ln>
             <a:noFill/>
           </a:ln>
@@ -3218,9 +3212,7 @@
           <a:prstGeom prst="rect">
             <a:avLst/>
           </a:prstGeom>
-          <a:solidFill>
-            <a:srgbClr val="FFD700"/>
-          </a:solidFill>
+          <a:solidFill>val="F0B429"/&gt;</a:solidFill>
           <a:ln>
             <a:noFill/>
           </a:ln>
@@ -3262,9 +3254,7 @@
           <a:prstGeom prst="rect">
             <a:avLst/>
           </a:prstGeom>
-          <a:solidFill>
-            <a:srgbClr val="146B4A"/>
-          </a:solidFill>
+          <a:solidFill>val="007A55"/&gt;</a:solidFill>
           <a:ln>
             <a:noFill/>
           </a:ln>
@@ -3306,9 +3296,7 @@
           <a:prstGeom prst="rect">
             <a:avLst/>
           </a:prstGeom>
-          <a:solidFill>
-            <a:srgbClr val="FFD700"/>
-          </a:solidFill>
+          <a:solidFill>val="F0B429"/&gt;</a:solidFill>
           <a:ln>
             <a:noFill/>
           </a:ln>
@@ -3361,10 +3349,8 @@
             <a:pPr algn="ctr"/>
             <a:r>
               <a:rPr sz="4000" b="1" i="0">
-                <a:solidFill>
-                  <a:srgbClr val="FFD700"/>
-                </a:solidFill>
-                <a:latin typeface="Calibri"/>
+                <a:solidFill>val="F0B429"/&gt;</a:solidFill>
+                <a:latin typeface="Poppins"/>
               </a:rPr>
               <a:t>COURS TIC 08</a:t>
             </a:r>
@@ -3396,10 +3382,8 @@
             <a:pPr algn="ctr"/>
             <a:r>
               <a:rPr sz="3000" b="1" i="0">
-                <a:solidFill>
-                  <a:srgbClr val="FFFFFF"/>
-                </a:solidFill>
-                <a:latin typeface="Calibri"/>
+                <a:solidFill>val="FFFFFF"/&gt;</a:solidFill>
+                <a:latin typeface="Poppins"/>
               </a:rPr>
               <a:t>Le World Wide Web</a:t>
             </a:r>
@@ -3420,9 +3404,7 @@
           <a:prstGeom prst="rect">
             <a:avLst/>
           </a:prstGeom>
-          <a:solidFill>
-            <a:srgbClr val="146B4A"/>
-          </a:solidFill>
+          <a:solidFill>val="007A55"/&gt;</a:solidFill>
           <a:ln>
             <a:noFill/>
           </a:ln>
@@ -3475,10 +3457,8 @@
             <a:pPr algn="ctr"/>
             <a:r>
               <a:rPr sz="1800" b="0" i="0">
-                <a:solidFill>
-                  <a:srgbClr val="BBBBBB"/>
-                </a:solidFill>
-                <a:latin typeface="Calibri"/>
+                <a:solidFill>val="9AA7B6"/&gt;</a:solidFill>
+                <a:latin typeface="Poppins"/>
               </a:rPr>
               <a:t>Dr. BELACEL Madani</a:t>
             </a:r>
@@ -3510,10 +3490,8 @@
             <a:pPr algn="ctr"/>
             <a:r>
               <a:rPr sz="1400" b="0" i="1">
-                <a:solidFill>
-                  <a:srgbClr val="BBBBBB"/>
-                </a:solidFill>
-                <a:latin typeface="Calibri"/>
+                <a:solidFill>val="9AA7B6"/&gt;</a:solidFill>
+                <a:latin typeface="Poppins"/>
               </a:rPr>
               <a:t>Année universitaire 2026-2027 / Academic Year 2026-2027</a:t>
             </a:r>
@@ -3545,10 +3523,8 @@
             <a:pPr algn="ctr"/>
             <a:r>
               <a:rPr sz="1200" b="0" i="1">
-                <a:solidFill>
-                  <a:srgbClr val="BBBBBB"/>
-                </a:solidFill>
-                <a:latin typeface="Calibri"/>
+                <a:solidFill>val="9AA7B6"/&gt;</a:solidFill>
+                <a:latin typeface="Poppins"/>
               </a:rPr>
               <a:t>Université de Mostaganem - Département Mathématiques et Informatique</a:t>
             </a:r>
@@ -3579,6 +3555,47 @@
           </a:prstGeom>
         </p:spPr>
       </p:pic>
+      <p:sp>
+        <p:nvSpPr>
+          <p:cNvPr id="990001" name="Pied de page FLE"/>
+          <p:cNvSpPr>
+            <a:spLocks noGrp="1"/>
+          </p:cNvSpPr>
+          <p:nvPr/>
+        </p:nvSpPr>
+        <p:spPr>
+          <a:xfrm>
+            <a:off x="4343400" y="-329184"/>
+            <a:ext cx="4572000" cy="274320"/>
+          </a:xfrm>
+          <a:prstGeom prst="rect">
+            <a:avLst/>
+          </a:prstGeom>
+        </p:spPr>
+        <p:txBody>
+          <a:bodyPr anchor="b"/>
+          <a:lstStyle/>
+          <a:p>
+            <a:pPr algn="r">
+              <a:defRPr sz="900">
+                <a:solidFill>
+                  <a:srgbClr val="9AA7B6"/>
+                </a:solidFill>
+                <a:latin typeface="Poppins"/>
+              </a:defRPr>
+            </a:pPr>
+            <a:r>
+              <a:rPr lang="fr-FR" sz="900">
+                <a:solidFill>
+                  <a:srgbClr val="9AA7B6"/>
+                </a:solidFill>
+                <a:latin typeface="Poppins"/>
+              </a:rPr>
+              <a:t>Université de Mostaganem — Dr. Madani BELACEL</a:t>
+            </a:r>
+          </a:p>
+        </p:txBody>
+      </p:sp>
     </p:spTree>
   </p:cSld>
   <p:clrMapOvr>
@@ -3592,9 +3609,7 @@
   <p:cSld>
     <p:bg>
       <p:bgPr>
-        <a:solidFill>
-          <a:srgbClr val="0B3D2E"/>
-        </a:solidFill>
+        <a:solidFill>val="004A38"/&gt;</a:solidFill>
         <a:effectLst/>
       </p:bgPr>
     </p:bg>
@@ -3619,9 +3634,7 @@
           <a:prstGeom prst="rect">
             <a:avLst/>
           </a:prstGeom>
-          <a:solidFill>
-            <a:srgbClr val="146B4A"/>
-          </a:solidFill>
+          <a:solidFill>val="007A55"/&gt;</a:solidFill>
           <a:ln>
             <a:noFill/>
           </a:ln>
@@ -3663,9 +3676,7 @@
           <a:prstGeom prst="rect">
             <a:avLst/>
           </a:prstGeom>
-          <a:solidFill>
-            <a:srgbClr val="FFD700"/>
-          </a:solidFill>
+          <a:solidFill>val="F0B429"/&gt;</a:solidFill>
           <a:ln>
             <a:noFill/>
           </a:ln>
@@ -3707,9 +3718,7 @@
           <a:prstGeom prst="rect">
             <a:avLst/>
           </a:prstGeom>
-          <a:solidFill>
-            <a:srgbClr val="FFD700"/>
-          </a:solidFill>
+          <a:solidFill>val="F0B429"/&gt;</a:solidFill>
           <a:ln>
             <a:noFill/>
           </a:ln>
@@ -3751,9 +3760,7 @@
           <a:prstGeom prst="rect">
             <a:avLst/>
           </a:prstGeom>
-          <a:solidFill>
-            <a:srgbClr val="146B4A"/>
-          </a:solidFill>
+          <a:solidFill>val="007A55"/&gt;</a:solidFill>
           <a:ln>
             <a:noFill/>
           </a:ln>
@@ -3806,10 +3813,8 @@
             <a:pPr algn="l"/>
             <a:r>
               <a:rPr sz="2400" b="1" i="0">
-                <a:solidFill>
-                  <a:srgbClr val="FFD700"/>
-                </a:solidFill>
-                <a:latin typeface="Calibri"/>
+                <a:solidFill>val="F0B429"/&gt;</a:solidFill>
+                <a:latin typeface="Poppins"/>
               </a:rPr>
               <a:t>4 - Hébergement et publication</a:t>
             </a:r>
@@ -3830,9 +3835,7 @@
           <a:prstGeom prst="rect">
             <a:avLst/>
           </a:prstGeom>
-          <a:solidFill>
-            <a:srgbClr val="146B4A"/>
-          </a:solidFill>
+          <a:solidFill>val="007A55"/&gt;</a:solidFill>
           <a:ln>
             <a:noFill/>
           </a:ln>
@@ -3889,10 +3892,8 @@
             </a:pPr>
             <a:r>
               <a:rPr sz="1800">
-                <a:solidFill>
-                  <a:srgbClr val="FFFFFF"/>
-                </a:solidFill>
-                <a:latin typeface="Calibri"/>
+                <a:solidFill>val="FFFFFF"/&gt;</a:solidFill>
+                <a:latin typeface="Poppins"/>
               </a:rPr>
               <a:t>▪  Nom de domaine : enregistrement (.dz, .com, .org...).</a:t>
             </a:r>
@@ -3905,10 +3906,8 @@
             </a:pPr>
             <a:r>
               <a:rPr sz="1800">
-                <a:solidFill>
-                  <a:srgbClr val="FFFFFF"/>
-                </a:solidFill>
-                <a:latin typeface="Calibri"/>
+                <a:solidFill>val="FFFFFF"/&gt;</a:solidFill>
+                <a:latin typeface="Poppins"/>
               </a:rPr>
               <a:t>▪  Hébergeur : serveur permanent connecté 24h/24.</a:t>
             </a:r>
@@ -3921,10 +3920,8 @@
             </a:pPr>
             <a:r>
               <a:rPr sz="1800">
-                <a:solidFill>
-                  <a:srgbClr val="FFFFFF"/>
-                </a:solidFill>
-                <a:latin typeface="Calibri"/>
+                <a:solidFill>val="FFFFFF"/&gt;</a:solidFill>
+                <a:latin typeface="Poppins"/>
               </a:rPr>
               <a:t>▪  Transfert des fichiers via FTP/SFTP.</a:t>
             </a:r>
@@ -3937,10 +3934,8 @@
             </a:pPr>
             <a:r>
               <a:rPr sz="1800">
-                <a:solidFill>
-                  <a:srgbClr val="FFFFFF"/>
-                </a:solidFill>
-                <a:latin typeface="Calibri"/>
+                <a:solidFill>val="FFFFFF"/&gt;</a:solidFill>
+                <a:latin typeface="Poppins"/>
               </a:rPr>
               <a:t>▪  CMS : WordPress, Joomla pour créer sans coder.</a:t>
             </a:r>
@@ -3971,6 +3966,47 @@
           </a:prstGeom>
         </p:spPr>
       </p:pic>
+      <p:sp>
+        <p:nvSpPr>
+          <p:cNvPr id="990001" name="Pied de page FLE"/>
+          <p:cNvSpPr>
+            <a:spLocks noGrp="1"/>
+          </p:cNvSpPr>
+          <p:nvPr/>
+        </p:nvSpPr>
+        <p:spPr>
+          <a:xfrm>
+            <a:off x="4343400" y="-329184"/>
+            <a:ext cx="4572000" cy="274320"/>
+          </a:xfrm>
+          <a:prstGeom prst="rect">
+            <a:avLst/>
+          </a:prstGeom>
+        </p:spPr>
+        <p:txBody>
+          <a:bodyPr anchor="b"/>
+          <a:lstStyle/>
+          <a:p>
+            <a:pPr algn="r">
+              <a:defRPr sz="900">
+                <a:solidFill>
+                  <a:srgbClr val="9AA7B6"/>
+                </a:solidFill>
+                <a:latin typeface="Poppins"/>
+              </a:defRPr>
+            </a:pPr>
+            <a:r>
+              <a:rPr lang="fr-FR" sz="900">
+                <a:solidFill>
+                  <a:srgbClr val="9AA7B6"/>
+                </a:solidFill>
+                <a:latin typeface="Poppins"/>
+              </a:rPr>
+              <a:t>Université de Mostaganem — Dr. Madani BELACEL</a:t>
+            </a:r>
+          </a:p>
+        </p:txBody>
+      </p:sp>
     </p:spTree>
   </p:cSld>
   <p:clrMapOvr>
@@ -3984,9 +4020,7 @@
   <p:cSld>
     <p:bg>
       <p:bgPr>
-        <a:solidFill>
-          <a:srgbClr val="0B3D2E"/>
-        </a:solidFill>
+        <a:solidFill>val="004A38"/&gt;</a:solidFill>
         <a:effectLst/>
       </p:bgPr>
     </p:bg>
@@ -4011,9 +4045,7 @@
           <a:prstGeom prst="rect">
             <a:avLst/>
           </a:prstGeom>
-          <a:solidFill>
-            <a:srgbClr val="146B4A"/>
-          </a:solidFill>
+          <a:solidFill>val="007A55"/&gt;</a:solidFill>
           <a:ln>
             <a:noFill/>
           </a:ln>
@@ -4055,9 +4087,7 @@
           <a:prstGeom prst="rect">
             <a:avLst/>
           </a:prstGeom>
-          <a:solidFill>
-            <a:srgbClr val="FFD700"/>
-          </a:solidFill>
+          <a:solidFill>val="F0B429"/&gt;</a:solidFill>
           <a:ln>
             <a:noFill/>
           </a:ln>
@@ -4099,9 +4129,7 @@
           <a:prstGeom prst="rect">
             <a:avLst/>
           </a:prstGeom>
-          <a:solidFill>
-            <a:srgbClr val="FFD700"/>
-          </a:solidFill>
+          <a:solidFill>val="F0B429"/&gt;</a:solidFill>
           <a:ln>
             <a:noFill/>
           </a:ln>
@@ -4143,9 +4171,7 @@
           <a:prstGeom prst="rect">
             <a:avLst/>
           </a:prstGeom>
-          <a:solidFill>
-            <a:srgbClr val="146B4A"/>
-          </a:solidFill>
+          <a:solidFill>val="007A55"/&gt;</a:solidFill>
           <a:ln>
             <a:noFill/>
           </a:ln>
@@ -4187,9 +4213,7 @@
           <a:prstGeom prst="rect">
             <a:avLst/>
           </a:prstGeom>
-          <a:solidFill>
-            <a:srgbClr val="146B4A"/>
-          </a:solidFill>
+          <a:solidFill>val="007A55"/&gt;</a:solidFill>
           <a:ln>
             <a:noFill/>
           </a:ln>
@@ -4242,10 +4266,8 @@
             <a:pPr algn="ctr"/>
             <a:r>
               <a:rPr sz="2200" b="1" i="0">
-                <a:solidFill>
-                  <a:srgbClr val="BBBBBB"/>
-                </a:solidFill>
-                <a:latin typeface="Calibri"/>
+                <a:solidFill>val="9AA7B6"/&gt;</a:solidFill>
+                <a:latin typeface="Poppins"/>
               </a:rPr>
               <a:t>Section 5</a:t>
             </a:r>
@@ -4277,10 +4299,8 @@
             <a:pPr algn="ctr"/>
             <a:r>
               <a:rPr sz="2800" b="1" i="0">
-                <a:solidFill>
-                  <a:srgbClr val="FFD700"/>
-                </a:solidFill>
-                <a:latin typeface="Calibri"/>
+                <a:solidFill>val="F0B429"/&gt;</a:solidFill>
+                <a:latin typeface="Poppins"/>
               </a:rPr>
               <a:t>Du Web 1.0 au Web 3.0</a:t>
             </a:r>
@@ -4311,6 +4331,47 @@
           </a:prstGeom>
         </p:spPr>
       </p:pic>
+      <p:sp>
+        <p:nvSpPr>
+          <p:cNvPr id="990001" name="Pied de page FLE"/>
+          <p:cNvSpPr>
+            <a:spLocks noGrp="1"/>
+          </p:cNvSpPr>
+          <p:nvPr/>
+        </p:nvSpPr>
+        <p:spPr>
+          <a:xfrm>
+            <a:off x="4343400" y="-329184"/>
+            <a:ext cx="4572000" cy="274320"/>
+          </a:xfrm>
+          <a:prstGeom prst="rect">
+            <a:avLst/>
+          </a:prstGeom>
+        </p:spPr>
+        <p:txBody>
+          <a:bodyPr anchor="b"/>
+          <a:lstStyle/>
+          <a:p>
+            <a:pPr algn="r">
+              <a:defRPr sz="900">
+                <a:solidFill>
+                  <a:srgbClr val="9AA7B6"/>
+                </a:solidFill>
+                <a:latin typeface="Poppins"/>
+              </a:defRPr>
+            </a:pPr>
+            <a:r>
+              <a:rPr lang="fr-FR" sz="900">
+                <a:solidFill>
+                  <a:srgbClr val="9AA7B6"/>
+                </a:solidFill>
+                <a:latin typeface="Poppins"/>
+              </a:rPr>
+              <a:t>Université de Mostaganem — Dr. Madani BELACEL</a:t>
+            </a:r>
+          </a:p>
+        </p:txBody>
+      </p:sp>
     </p:spTree>
   </p:cSld>
   <p:clrMapOvr>
@@ -4324,9 +4385,7 @@
   <p:cSld>
     <p:bg>
       <p:bgPr>
-        <a:solidFill>
-          <a:srgbClr val="0B3D2E"/>
-        </a:solidFill>
+        <a:solidFill>val="004A38"/&gt;</a:solidFill>
         <a:effectLst/>
       </p:bgPr>
     </p:bg>
@@ -4351,9 +4410,7 @@
           <a:prstGeom prst="rect">
             <a:avLst/>
           </a:prstGeom>
-          <a:solidFill>
-            <a:srgbClr val="146B4A"/>
-          </a:solidFill>
+          <a:solidFill>val="007A55"/&gt;</a:solidFill>
           <a:ln>
             <a:noFill/>
           </a:ln>
@@ -4395,9 +4452,7 @@
           <a:prstGeom prst="rect">
             <a:avLst/>
           </a:prstGeom>
-          <a:solidFill>
-            <a:srgbClr val="FFD700"/>
-          </a:solidFill>
+          <a:solidFill>val="F0B429"/&gt;</a:solidFill>
           <a:ln>
             <a:noFill/>
           </a:ln>
@@ -4439,9 +4494,7 @@
           <a:prstGeom prst="rect">
             <a:avLst/>
           </a:prstGeom>
-          <a:solidFill>
-            <a:srgbClr val="FFD700"/>
-          </a:solidFill>
+          <a:solidFill>val="F0B429"/&gt;</a:solidFill>
           <a:ln>
             <a:noFill/>
           </a:ln>
@@ -4483,9 +4536,7 @@
           <a:prstGeom prst="rect">
             <a:avLst/>
           </a:prstGeom>
-          <a:solidFill>
-            <a:srgbClr val="146B4A"/>
-          </a:solidFill>
+          <a:solidFill>val="007A55"/&gt;</a:solidFill>
           <a:ln>
             <a:noFill/>
           </a:ln>
@@ -4538,10 +4589,8 @@
             <a:pPr algn="l"/>
             <a:r>
               <a:rPr sz="2400" b="1" i="0">
-                <a:solidFill>
-                  <a:srgbClr val="FFD700"/>
-                </a:solidFill>
-                <a:latin typeface="Calibri"/>
+                <a:solidFill>val="F0B429"/&gt;</a:solidFill>
+                <a:latin typeface="Poppins"/>
               </a:rPr>
               <a:t>5 - Du Web 1.0 au Web 3.0</a:t>
             </a:r>
@@ -4562,9 +4611,7 @@
           <a:prstGeom prst="rect">
             <a:avLst/>
           </a:prstGeom>
-          <a:solidFill>
-            <a:srgbClr val="146B4A"/>
-          </a:solidFill>
+          <a:solidFill>val="007A55"/&gt;</a:solidFill>
           <a:ln>
             <a:noFill/>
           </a:ln>
@@ -4621,10 +4668,8 @@
             </a:pPr>
             <a:r>
               <a:rPr sz="1800">
-                <a:solidFill>
-                  <a:srgbClr val="FFFFFF"/>
-                </a:solidFill>
-                <a:latin typeface="Calibri"/>
+                <a:solidFill>val="FFFFFF"/&gt;</a:solidFill>
+                <a:latin typeface="Poppins"/>
               </a:rPr>
               <a:t>▪  Web 1.0 : pages statiques en lecture seule.</a:t>
             </a:r>
@@ -4637,10 +4682,8 @@
             </a:pPr>
             <a:r>
               <a:rPr sz="1800">
-                <a:solidFill>
-                  <a:srgbClr val="FFFFFF"/>
-                </a:solidFill>
-                <a:latin typeface="Calibri"/>
+                <a:solidFill>val="FFFFFF"/&gt;</a:solidFill>
+                <a:latin typeface="Poppins"/>
               </a:rPr>
               <a:t>▪  Web 2.0 : participatif, réseaux sociaux, wikis, blogs.</a:t>
             </a:r>
@@ -4653,10 +4696,8 @@
             </a:pPr>
             <a:r>
               <a:rPr sz="1800">
-                <a:solidFill>
-                  <a:srgbClr val="FFFFFF"/>
-                </a:solidFill>
-                <a:latin typeface="Calibri"/>
+                <a:solidFill>val="FFFFFF"/&gt;</a:solidFill>
+                <a:latin typeface="Poppins"/>
               </a:rPr>
               <a:t>▪  Web sémantique (3.0) : données structurées, IA.</a:t>
             </a:r>
@@ -4669,10 +4710,8 @@
             </a:pPr>
             <a:r>
               <a:rPr sz="1800">
-                <a:solidFill>
-                  <a:srgbClr val="FFFFFF"/>
-                </a:solidFill>
-                <a:latin typeface="Calibri"/>
+                <a:solidFill>val="FFFFFF"/&gt;</a:solidFill>
+                <a:latin typeface="Poppins"/>
               </a:rPr>
               <a:t>▪  Applications riches : SPA, cloud, temps réel.</a:t>
             </a:r>
@@ -4703,6 +4742,47 @@
           </a:prstGeom>
         </p:spPr>
       </p:pic>
+      <p:sp>
+        <p:nvSpPr>
+          <p:cNvPr id="990001" name="Pied de page FLE"/>
+          <p:cNvSpPr>
+            <a:spLocks noGrp="1"/>
+          </p:cNvSpPr>
+          <p:nvPr/>
+        </p:nvSpPr>
+        <p:spPr>
+          <a:xfrm>
+            <a:off x="4343400" y="-329184"/>
+            <a:ext cx="4572000" cy="274320"/>
+          </a:xfrm>
+          <a:prstGeom prst="rect">
+            <a:avLst/>
+          </a:prstGeom>
+        </p:spPr>
+        <p:txBody>
+          <a:bodyPr anchor="b"/>
+          <a:lstStyle/>
+          <a:p>
+            <a:pPr algn="r">
+              <a:defRPr sz="900">
+                <a:solidFill>
+                  <a:srgbClr val="9AA7B6"/>
+                </a:solidFill>
+                <a:latin typeface="Poppins"/>
+              </a:defRPr>
+            </a:pPr>
+            <a:r>
+              <a:rPr lang="fr-FR" sz="900">
+                <a:solidFill>
+                  <a:srgbClr val="9AA7B6"/>
+                </a:solidFill>
+                <a:latin typeface="Poppins"/>
+              </a:rPr>
+              <a:t>Université de Mostaganem — Dr. Madani BELACEL</a:t>
+            </a:r>
+          </a:p>
+        </p:txBody>
+      </p:sp>
     </p:spTree>
   </p:cSld>
   <p:clrMapOvr>
@@ -4716,9 +4796,7 @@
   <p:cSld>
     <p:bg>
       <p:bgPr>
-        <a:solidFill>
-          <a:srgbClr val="0B3D2E"/>
-        </a:solidFill>
+        <a:solidFill>val="004A38"/&gt;</a:solidFill>
         <a:effectLst/>
       </p:bgPr>
     </p:bg>
@@ -4743,9 +4821,7 @@
           <a:prstGeom prst="rect">
             <a:avLst/>
           </a:prstGeom>
-          <a:solidFill>
-            <a:srgbClr val="146B4A"/>
-          </a:solidFill>
+          <a:solidFill>val="007A55"/&gt;</a:solidFill>
           <a:ln>
             <a:noFill/>
           </a:ln>
@@ -4787,9 +4863,7 @@
           <a:prstGeom prst="rect">
             <a:avLst/>
           </a:prstGeom>
-          <a:solidFill>
-            <a:srgbClr val="FFD700"/>
-          </a:solidFill>
+          <a:solidFill>val="F0B429"/&gt;</a:solidFill>
           <a:ln>
             <a:noFill/>
           </a:ln>
@@ -4831,9 +4905,7 @@
           <a:prstGeom prst="rect">
             <a:avLst/>
           </a:prstGeom>
-          <a:solidFill>
-            <a:srgbClr val="FFD700"/>
-          </a:solidFill>
+          <a:solidFill>val="F0B429"/&gt;</a:solidFill>
           <a:ln>
             <a:noFill/>
           </a:ln>
@@ -4875,9 +4947,7 @@
           <a:prstGeom prst="rect">
             <a:avLst/>
           </a:prstGeom>
-          <a:solidFill>
-            <a:srgbClr val="146B4A"/>
-          </a:solidFill>
+          <a:solidFill>val="007A55"/&gt;</a:solidFill>
           <a:ln>
             <a:noFill/>
           </a:ln>
@@ -4919,9 +4989,7 @@
           <a:prstGeom prst="rect">
             <a:avLst/>
           </a:prstGeom>
-          <a:solidFill>
-            <a:srgbClr val="146B4A"/>
-          </a:solidFill>
+          <a:solidFill>val="007A55"/&gt;</a:solidFill>
           <a:ln>
             <a:noFill/>
           </a:ln>
@@ -4974,10 +5042,8 @@
             <a:pPr algn="ctr"/>
             <a:r>
               <a:rPr sz="2200" b="1" i="0">
-                <a:solidFill>
-                  <a:srgbClr val="BBBBBB"/>
-                </a:solidFill>
-                <a:latin typeface="Calibri"/>
+                <a:solidFill>val="9AA7B6"/&gt;</a:solidFill>
+                <a:latin typeface="Poppins"/>
               </a:rPr>
               <a:t>Section 6</a:t>
             </a:r>
@@ -5009,10 +5075,8 @@
             <a:pPr algn="ctr"/>
             <a:r>
               <a:rPr sz="2800" b="1" i="0">
-                <a:solidFill>
-                  <a:srgbClr val="FFD700"/>
-                </a:solidFill>
-                <a:latin typeface="Calibri"/>
+                <a:solidFill>val="F0B429"/&gt;</a:solidFill>
+                <a:latin typeface="Poppins"/>
               </a:rPr>
               <a:t>Navigation efficace</a:t>
             </a:r>
@@ -5043,6 +5107,47 @@
           </a:prstGeom>
         </p:spPr>
       </p:pic>
+      <p:sp>
+        <p:nvSpPr>
+          <p:cNvPr id="990001" name="Pied de page FLE"/>
+          <p:cNvSpPr>
+            <a:spLocks noGrp="1"/>
+          </p:cNvSpPr>
+          <p:nvPr/>
+        </p:nvSpPr>
+        <p:spPr>
+          <a:xfrm>
+            <a:off x="4343400" y="-329184"/>
+            <a:ext cx="4572000" cy="274320"/>
+          </a:xfrm>
+          <a:prstGeom prst="rect">
+            <a:avLst/>
+          </a:prstGeom>
+        </p:spPr>
+        <p:txBody>
+          <a:bodyPr anchor="b"/>
+          <a:lstStyle/>
+          <a:p>
+            <a:pPr algn="r">
+              <a:defRPr sz="900">
+                <a:solidFill>
+                  <a:srgbClr val="9AA7B6"/>
+                </a:solidFill>
+                <a:latin typeface="Poppins"/>
+              </a:defRPr>
+            </a:pPr>
+            <a:r>
+              <a:rPr lang="fr-FR" sz="900">
+                <a:solidFill>
+                  <a:srgbClr val="9AA7B6"/>
+                </a:solidFill>
+                <a:latin typeface="Poppins"/>
+              </a:rPr>
+              <a:t>Université de Mostaganem — Dr. Madani BELACEL</a:t>
+            </a:r>
+          </a:p>
+        </p:txBody>
+      </p:sp>
     </p:spTree>
   </p:cSld>
   <p:clrMapOvr>
@@ -5056,9 +5161,7 @@
   <p:cSld>
     <p:bg>
       <p:bgPr>
-        <a:solidFill>
-          <a:srgbClr val="0B3D2E"/>
-        </a:solidFill>
+        <a:solidFill>val="004A38"/&gt;</a:solidFill>
         <a:effectLst/>
       </p:bgPr>
     </p:bg>
@@ -5083,9 +5186,7 @@
           <a:prstGeom prst="rect">
             <a:avLst/>
           </a:prstGeom>
-          <a:solidFill>
-            <a:srgbClr val="146B4A"/>
-          </a:solidFill>
+          <a:solidFill>val="007A55"/&gt;</a:solidFill>
           <a:ln>
             <a:noFill/>
           </a:ln>
@@ -5127,9 +5228,7 @@
           <a:prstGeom prst="rect">
             <a:avLst/>
           </a:prstGeom>
-          <a:solidFill>
-            <a:srgbClr val="FFD700"/>
-          </a:solidFill>
+          <a:solidFill>val="F0B429"/&gt;</a:solidFill>
           <a:ln>
             <a:noFill/>
           </a:ln>
@@ -5171,9 +5270,7 @@
           <a:prstGeom prst="rect">
             <a:avLst/>
           </a:prstGeom>
-          <a:solidFill>
-            <a:srgbClr val="FFD700"/>
-          </a:solidFill>
+          <a:solidFill>val="F0B429"/&gt;</a:solidFill>
           <a:ln>
             <a:noFill/>
           </a:ln>
@@ -5215,9 +5312,7 @@
           <a:prstGeom prst="rect">
             <a:avLst/>
           </a:prstGeom>
-          <a:solidFill>
-            <a:srgbClr val="146B4A"/>
-          </a:solidFill>
+          <a:solidFill>val="007A55"/&gt;</a:solidFill>
           <a:ln>
             <a:noFill/>
           </a:ln>
@@ -5270,10 +5365,8 @@
             <a:pPr algn="l"/>
             <a:r>
               <a:rPr sz="2400" b="1" i="0">
-                <a:solidFill>
-                  <a:srgbClr val="FFD700"/>
-                </a:solidFill>
-                <a:latin typeface="Calibri"/>
+                <a:solidFill>val="F0B429"/&gt;</a:solidFill>
+                <a:latin typeface="Poppins"/>
               </a:rPr>
               <a:t>6 - Navigation efficace</a:t>
             </a:r>
@@ -5294,9 +5387,7 @@
           <a:prstGeom prst="rect">
             <a:avLst/>
           </a:prstGeom>
-          <a:solidFill>
-            <a:srgbClr val="146B4A"/>
-          </a:solidFill>
+          <a:solidFill>val="007A55"/&gt;</a:solidFill>
           <a:ln>
             <a:noFill/>
           </a:ln>
@@ -5353,10 +5444,8 @@
             </a:pPr>
             <a:r>
               <a:rPr sz="1800">
-                <a:solidFill>
-                  <a:srgbClr val="FFFFFF"/>
-                </a:solidFill>
-                <a:latin typeface="Calibri"/>
+                <a:solidFill>val="FFFFFF"/&gt;</a:solidFill>
+                <a:latin typeface="Poppins"/>
               </a:rPr>
               <a:t>▪  Onglets et favoris pour gérer plusieurs sources.</a:t>
             </a:r>
@@ -5369,10 +5458,8 @@
             </a:pPr>
             <a:r>
               <a:rPr sz="1800">
-                <a:solidFill>
-                  <a:srgbClr val="FFFFFF"/>
-                </a:solidFill>
-                <a:latin typeface="Calibri"/>
+                <a:solidFill>val="FFFFFF"/&gt;</a:solidFill>
+                <a:latin typeface="Poppins"/>
               </a:rPr>
               <a:t>▪  Recherche avancée et filtres.</a:t>
             </a:r>
@@ -5385,10 +5472,8 @@
             </a:pPr>
             <a:r>
               <a:rPr sz="1800">
-                <a:solidFill>
-                  <a:srgbClr val="FFFFFF"/>
-                </a:solidFill>
-                <a:latin typeface="Calibri"/>
+                <a:solidFill>val="FFFFFF"/&gt;</a:solidFill>
+                <a:latin typeface="Poppins"/>
               </a:rPr>
               <a:t>▪  Extensions utiles : bloqueur de pub, traducteur.</a:t>
             </a:r>
@@ -5401,10 +5486,8 @@
             </a:pPr>
             <a:r>
               <a:rPr sz="1800">
-                <a:solidFill>
-                  <a:srgbClr val="FFFFFF"/>
-                </a:solidFill>
-                <a:latin typeface="Calibri"/>
+                <a:solidFill>val="FFFFFF"/&gt;</a:solidFill>
+                <a:latin typeface="Poppins"/>
               </a:rPr>
               <a:t>▪  Mode privé et effacement de l'historique.</a:t>
             </a:r>
@@ -5435,6 +5518,47 @@
           </a:prstGeom>
         </p:spPr>
       </p:pic>
+      <p:sp>
+        <p:nvSpPr>
+          <p:cNvPr id="990001" name="Pied de page FLE"/>
+          <p:cNvSpPr>
+            <a:spLocks noGrp="1"/>
+          </p:cNvSpPr>
+          <p:nvPr/>
+        </p:nvSpPr>
+        <p:spPr>
+          <a:xfrm>
+            <a:off x="4343400" y="-329184"/>
+            <a:ext cx="4572000" cy="274320"/>
+          </a:xfrm>
+          <a:prstGeom prst="rect">
+            <a:avLst/>
+          </a:prstGeom>
+        </p:spPr>
+        <p:txBody>
+          <a:bodyPr anchor="b"/>
+          <a:lstStyle/>
+          <a:p>
+            <a:pPr algn="r">
+              <a:defRPr sz="900">
+                <a:solidFill>
+                  <a:srgbClr val="9AA7B6"/>
+                </a:solidFill>
+                <a:latin typeface="Poppins"/>
+              </a:defRPr>
+            </a:pPr>
+            <a:r>
+              <a:rPr lang="fr-FR" sz="900">
+                <a:solidFill>
+                  <a:srgbClr val="9AA7B6"/>
+                </a:solidFill>
+                <a:latin typeface="Poppins"/>
+              </a:rPr>
+              <a:t>Université de Mostaganem — Dr. Madani BELACEL</a:t>
+            </a:r>
+          </a:p>
+        </p:txBody>
+      </p:sp>
     </p:spTree>
   </p:cSld>
   <p:clrMapOvr>
@@ -5448,9 +5572,7 @@
   <p:cSld>
     <p:bg>
       <p:bgPr>
-        <a:solidFill>
-          <a:srgbClr val="0B3D2E"/>
-        </a:solidFill>
+        <a:solidFill>val="004A38"/&gt;</a:solidFill>
         <a:effectLst/>
       </p:bgPr>
     </p:bg>
@@ -5475,9 +5597,7 @@
           <a:prstGeom prst="rect">
             <a:avLst/>
           </a:prstGeom>
-          <a:solidFill>
-            <a:srgbClr val="146B4A"/>
-          </a:solidFill>
+          <a:solidFill>val="007A55"/&gt;</a:solidFill>
           <a:ln>
             <a:noFill/>
           </a:ln>
@@ -5519,9 +5639,7 @@
           <a:prstGeom prst="rect">
             <a:avLst/>
           </a:prstGeom>
-          <a:solidFill>
-            <a:srgbClr val="FFD700"/>
-          </a:solidFill>
+          <a:solidFill>val="F0B429"/&gt;</a:solidFill>
           <a:ln>
             <a:noFill/>
           </a:ln>
@@ -5563,9 +5681,7 @@
           <a:prstGeom prst="rect">
             <a:avLst/>
           </a:prstGeom>
-          <a:solidFill>
-            <a:srgbClr val="FFD700"/>
-          </a:solidFill>
+          <a:solidFill>val="F0B429"/&gt;</a:solidFill>
           <a:ln>
             <a:noFill/>
           </a:ln>
@@ -5607,9 +5723,7 @@
           <a:prstGeom prst="rect">
             <a:avLst/>
           </a:prstGeom>
-          <a:solidFill>
-            <a:srgbClr val="146B4A"/>
-          </a:solidFill>
+          <a:solidFill>val="007A55"/&gt;</a:solidFill>
           <a:ln>
             <a:noFill/>
           </a:ln>
@@ -5651,9 +5765,7 @@
           <a:prstGeom prst="rect">
             <a:avLst/>
           </a:prstGeom>
-          <a:solidFill>
-            <a:srgbClr val="146B4A"/>
-          </a:solidFill>
+          <a:solidFill>val="007A55"/&gt;</a:solidFill>
           <a:ln>
             <a:noFill/>
           </a:ln>
@@ -5706,10 +5818,8 @@
             <a:pPr algn="ctr"/>
             <a:r>
               <a:rPr sz="2200" b="1" i="0">
-                <a:solidFill>
-                  <a:srgbClr val="BBBBBB"/>
-                </a:solidFill>
-                <a:latin typeface="Calibri"/>
+                <a:solidFill>val="9AA7B6"/&gt;</a:solidFill>
+                <a:latin typeface="Poppins"/>
               </a:rPr>
               <a:t>Section 7</a:t>
             </a:r>
@@ -5741,10 +5851,8 @@
             <a:pPr algn="ctr"/>
             <a:r>
               <a:rPr sz="2800" b="1" i="0">
-                <a:solidFill>
-                  <a:srgbClr val="FFD700"/>
-                </a:solidFill>
-                <a:latin typeface="Calibri"/>
+                <a:solidFill>val="F0B429"/&gt;</a:solidFill>
+                <a:latin typeface="Poppins"/>
               </a:rPr>
               <a:t>Qualité et fiabilité des contenus</a:t>
             </a:r>
@@ -5775,6 +5883,47 @@
           </a:prstGeom>
         </p:spPr>
       </p:pic>
+      <p:sp>
+        <p:nvSpPr>
+          <p:cNvPr id="990001" name="Pied de page FLE"/>
+          <p:cNvSpPr>
+            <a:spLocks noGrp="1"/>
+          </p:cNvSpPr>
+          <p:nvPr/>
+        </p:nvSpPr>
+        <p:spPr>
+          <a:xfrm>
+            <a:off x="4343400" y="-329184"/>
+            <a:ext cx="4572000" cy="274320"/>
+          </a:xfrm>
+          <a:prstGeom prst="rect">
+            <a:avLst/>
+          </a:prstGeom>
+        </p:spPr>
+        <p:txBody>
+          <a:bodyPr anchor="b"/>
+          <a:lstStyle/>
+          <a:p>
+            <a:pPr algn="r">
+              <a:defRPr sz="900">
+                <a:solidFill>
+                  <a:srgbClr val="9AA7B6"/>
+                </a:solidFill>
+                <a:latin typeface="Poppins"/>
+              </a:defRPr>
+            </a:pPr>
+            <a:r>
+              <a:rPr lang="fr-FR" sz="900">
+                <a:solidFill>
+                  <a:srgbClr val="9AA7B6"/>
+                </a:solidFill>
+                <a:latin typeface="Poppins"/>
+              </a:rPr>
+              <a:t>Université de Mostaganem — Dr. Madani BELACEL</a:t>
+            </a:r>
+          </a:p>
+        </p:txBody>
+      </p:sp>
     </p:spTree>
   </p:cSld>
   <p:clrMapOvr>
@@ -5788,9 +5937,7 @@
   <p:cSld>
     <p:bg>
       <p:bgPr>
-        <a:solidFill>
-          <a:srgbClr val="0B3D2E"/>
-        </a:solidFill>
+        <a:solidFill>val="004A38"/&gt;</a:solidFill>
         <a:effectLst/>
       </p:bgPr>
     </p:bg>
@@ -5815,9 +5962,7 @@
           <a:prstGeom prst="rect">
             <a:avLst/>
           </a:prstGeom>
-          <a:solidFill>
-            <a:srgbClr val="146B4A"/>
-          </a:solidFill>
+          <a:solidFill>val="007A55"/&gt;</a:solidFill>
           <a:ln>
             <a:noFill/>
           </a:ln>
@@ -5859,9 +6004,7 @@
           <a:prstGeom prst="rect">
             <a:avLst/>
           </a:prstGeom>
-          <a:solidFill>
-            <a:srgbClr val="FFD700"/>
-          </a:solidFill>
+          <a:solidFill>val="F0B429"/&gt;</a:solidFill>
           <a:ln>
             <a:noFill/>
           </a:ln>
@@ -5903,9 +6046,7 @@
           <a:prstGeom prst="rect">
             <a:avLst/>
           </a:prstGeom>
-          <a:solidFill>
-            <a:srgbClr val="FFD700"/>
-          </a:solidFill>
+          <a:solidFill>val="F0B429"/&gt;</a:solidFill>
           <a:ln>
             <a:noFill/>
           </a:ln>
@@ -5947,9 +6088,7 @@
           <a:prstGeom prst="rect">
             <a:avLst/>
           </a:prstGeom>
-          <a:solidFill>
-            <a:srgbClr val="146B4A"/>
-          </a:solidFill>
+          <a:solidFill>val="007A55"/&gt;</a:solidFill>
           <a:ln>
             <a:noFill/>
           </a:ln>
@@ -6002,10 +6141,8 @@
             <a:pPr algn="l"/>
             <a:r>
               <a:rPr sz="2400" b="1" i="0">
-                <a:solidFill>
-                  <a:srgbClr val="FFD700"/>
-                </a:solidFill>
-                <a:latin typeface="Calibri"/>
+                <a:solidFill>val="F0B429"/&gt;</a:solidFill>
+                <a:latin typeface="Poppins"/>
               </a:rPr>
               <a:t>7 - Qualité et fiabilité des contenus</a:t>
             </a:r>
@@ -6026,9 +6163,7 @@
           <a:prstGeom prst="rect">
             <a:avLst/>
           </a:prstGeom>
-          <a:solidFill>
-            <a:srgbClr val="146B4A"/>
-          </a:solidFill>
+          <a:solidFill>val="007A55"/&gt;</a:solidFill>
           <a:ln>
             <a:noFill/>
           </a:ln>
@@ -6085,10 +6220,8 @@
             </a:pPr>
             <a:r>
               <a:rPr sz="1800">
-                <a:solidFill>
-                  <a:srgbClr val="FFFFFF"/>
-                </a:solidFill>
-                <a:latin typeface="Calibri"/>
+                <a:solidFill>val="FFFFFF"/&gt;</a:solidFill>
+                <a:latin typeface="Poppins"/>
               </a:rPr>
               <a:t>▪  Vérifier l'auteur, la date et la source du site.</a:t>
             </a:r>
@@ -6101,10 +6234,8 @@
             </a:pPr>
             <a:r>
               <a:rPr sz="1800">
-                <a:solidFill>
-                  <a:srgbClr val="FFFFFF"/>
-                </a:solidFill>
-                <a:latin typeface="Calibri"/>
+                <a:solidFill>val="FFFFFF"/&gt;</a:solidFill>
+                <a:latin typeface="Poppins"/>
               </a:rPr>
               <a:t>▪  Croiser l'information avec plusieurs références.</a:t>
             </a:r>
@@ -6117,10 +6248,8 @@
             </a:pPr>
             <a:r>
               <a:rPr sz="1800">
-                <a:solidFill>
-                  <a:srgbClr val="FFFFFF"/>
-                </a:solidFill>
-                <a:latin typeface="Calibri"/>
+                <a:solidFill>val="FFFFFF"/&gt;</a:solidFill>
+                <a:latin typeface="Poppins"/>
               </a:rPr>
               <a:t>▪  Attention aux fausses informations (fake news).</a:t>
             </a:r>
@@ -6133,10 +6262,8 @@
             </a:pPr>
             <a:r>
               <a:rPr sz="1800">
-                <a:solidFill>
-                  <a:srgbClr val="FFFFFF"/>
-                </a:solidFill>
-                <a:latin typeface="Calibri"/>
+                <a:solidFill>val="FFFFFF"/&gt;</a:solidFill>
+                <a:latin typeface="Poppins"/>
               </a:rPr>
               <a:t>▪  Citer ses sources : respect du droit d'auteur.</a:t>
             </a:r>
@@ -6167,6 +6294,47 @@
           </a:prstGeom>
         </p:spPr>
       </p:pic>
+      <p:sp>
+        <p:nvSpPr>
+          <p:cNvPr id="990001" name="Pied de page FLE"/>
+          <p:cNvSpPr>
+            <a:spLocks noGrp="1"/>
+          </p:cNvSpPr>
+          <p:nvPr/>
+        </p:nvSpPr>
+        <p:spPr>
+          <a:xfrm>
+            <a:off x="4343400" y="-329184"/>
+            <a:ext cx="4572000" cy="274320"/>
+          </a:xfrm>
+          <a:prstGeom prst="rect">
+            <a:avLst/>
+          </a:prstGeom>
+        </p:spPr>
+        <p:txBody>
+          <a:bodyPr anchor="b"/>
+          <a:lstStyle/>
+          <a:p>
+            <a:pPr algn="r">
+              <a:defRPr sz="900">
+                <a:solidFill>
+                  <a:srgbClr val="9AA7B6"/>
+                </a:solidFill>
+                <a:latin typeface="Poppins"/>
+              </a:defRPr>
+            </a:pPr>
+            <a:r>
+              <a:rPr lang="fr-FR" sz="900">
+                <a:solidFill>
+                  <a:srgbClr val="9AA7B6"/>
+                </a:solidFill>
+                <a:latin typeface="Poppins"/>
+              </a:rPr>
+              <a:t>Université de Mostaganem — Dr. Madani BELACEL</a:t>
+            </a:r>
+          </a:p>
+        </p:txBody>
+      </p:sp>
     </p:spTree>
   </p:cSld>
   <p:clrMapOvr>
@@ -6180,9 +6348,7 @@
   <p:cSld>
     <p:bg>
       <p:bgPr>
-        <a:solidFill>
-          <a:srgbClr val="FF8C00"/>
-        </a:solidFill>
+        <a:solidFill>val="F0B429"/&gt;</a:solidFill>
         <a:effectLst/>
       </p:bgPr>
     </p:bg>
@@ -6207,9 +6373,7 @@
           <a:prstGeom prst="rect">
             <a:avLst/>
           </a:prstGeom>
-          <a:solidFill>
-            <a:srgbClr val="146B4A"/>
-          </a:solidFill>
+          <a:solidFill>val="007A55"/&gt;</a:solidFill>
           <a:ln>
             <a:noFill/>
           </a:ln>
@@ -6251,9 +6415,7 @@
           <a:prstGeom prst="rect">
             <a:avLst/>
           </a:prstGeom>
-          <a:solidFill>
-            <a:srgbClr val="FFD700"/>
-          </a:solidFill>
+          <a:solidFill>val="F0B429"/&gt;</a:solidFill>
           <a:ln>
             <a:noFill/>
           </a:ln>
@@ -6295,9 +6457,7 @@
           <a:prstGeom prst="rect">
             <a:avLst/>
           </a:prstGeom>
-          <a:solidFill>
-            <a:srgbClr val="FFD700"/>
-          </a:solidFill>
+          <a:solidFill>val="F0B429"/&gt;</a:solidFill>
           <a:ln>
             <a:noFill/>
           </a:ln>
@@ -6339,9 +6499,7 @@
           <a:prstGeom prst="rect">
             <a:avLst/>
           </a:prstGeom>
-          <a:solidFill>
-            <a:srgbClr val="146B4A"/>
-          </a:solidFill>
+          <a:solidFill>val="007A55"/&gt;</a:solidFill>
           <a:ln>
             <a:noFill/>
           </a:ln>
@@ -6394,10 +6552,8 @@
             <a:pPr algn="ctr"/>
             <a:r>
               <a:rPr sz="3000" b="1" i="0">
-                <a:solidFill>
-                  <a:srgbClr val="0B3D2E"/>
-                </a:solidFill>
-                <a:latin typeface="Calibri"/>
+                <a:solidFill>val="004A38"/&gt;</a:solidFill>
+                <a:latin typeface="Poppins"/>
               </a:rPr>
               <a:t>Intérêt pratique</a:t>
             </a:r>
@@ -6433,10 +6589,8 @@
             </a:pPr>
             <a:r>
               <a:rPr sz="1700">
-                <a:solidFill>
-                  <a:srgbClr val="0B3D2E"/>
-                </a:solidFill>
-                <a:latin typeface="Calibri"/>
+                <a:solidFill>val="004A38"/&gt;</a:solidFill>
+                <a:latin typeface="Poppins"/>
               </a:rPr>
               <a:t>▪  Créer son propre site ou portfolio professionnel en ligne.</a:t>
             </a:r>
@@ -6449,10 +6603,8 @@
             </a:pPr>
             <a:r>
               <a:rPr sz="1700">
-                <a:solidFill>
-                  <a:srgbClr val="0B3D2E"/>
-                </a:solidFill>
-                <a:latin typeface="Calibri"/>
+                <a:solidFill>val="004A38"/&gt;</a:solidFill>
+                <a:latin typeface="Poppins"/>
               </a:rPr>
               <a:t>▪  Utiliser le Web comme outil de veille scientifique.</a:t>
             </a:r>
@@ -6465,10 +6617,8 @@
             </a:pPr>
             <a:r>
               <a:rPr sz="1700">
-                <a:solidFill>
-                  <a:srgbClr val="0B3D2E"/>
-                </a:solidFill>
-                <a:latin typeface="Calibri"/>
+                <a:solidFill>val="004A38"/&gt;</a:solidFill>
+                <a:latin typeface="Poppins"/>
               </a:rPr>
               <a:t>▪  Comprendre le fonctionnement derrière chaque clic.</a:t>
             </a:r>
@@ -6481,10 +6631,8 @@
             </a:pPr>
             <a:r>
               <a:rPr sz="1700">
-                <a:solidFill>
-                  <a:srgbClr val="0B3D2E"/>
-                </a:solidFill>
-                <a:latin typeface="Calibri"/>
+                <a:solidFill>val="004A38"/&gt;</a:solidFill>
+                <a:latin typeface="Poppins"/>
               </a:rPr>
               <a:t>▪  Base indispensable pour apprendre le développement web.</a:t>
             </a:r>
@@ -6515,6 +6663,47 @@
           </a:prstGeom>
         </p:spPr>
       </p:pic>
+      <p:sp>
+        <p:nvSpPr>
+          <p:cNvPr id="990001" name="Pied de page FLE"/>
+          <p:cNvSpPr>
+            <a:spLocks noGrp="1"/>
+          </p:cNvSpPr>
+          <p:nvPr/>
+        </p:nvSpPr>
+        <p:spPr>
+          <a:xfrm>
+            <a:off x="4343400" y="-329184"/>
+            <a:ext cx="4572000" cy="274320"/>
+          </a:xfrm>
+          <a:prstGeom prst="rect">
+            <a:avLst/>
+          </a:prstGeom>
+        </p:spPr>
+        <p:txBody>
+          <a:bodyPr anchor="b"/>
+          <a:lstStyle/>
+          <a:p>
+            <a:pPr algn="r">
+              <a:defRPr sz="900">
+                <a:solidFill>
+                  <a:srgbClr val="9AA7B6"/>
+                </a:solidFill>
+                <a:latin typeface="Poppins"/>
+              </a:defRPr>
+            </a:pPr>
+            <a:r>
+              <a:rPr lang="fr-FR" sz="900">
+                <a:solidFill>
+                  <a:srgbClr val="9AA7B6"/>
+                </a:solidFill>
+                <a:latin typeface="Poppins"/>
+              </a:rPr>
+              <a:t>Université de Mostaganem — Dr. Madani BELACEL</a:t>
+            </a:r>
+          </a:p>
+        </p:txBody>
+      </p:sp>
     </p:spTree>
   </p:cSld>
   <p:clrMapOvr>
@@ -6528,9 +6717,7 @@
   <p:cSld>
     <p:bg>
       <p:bgPr>
-        <a:solidFill>
-          <a:srgbClr val="0B3D2E"/>
-        </a:solidFill>
+        <a:solidFill>val="004A38"/&gt;</a:solidFill>
         <a:effectLst/>
       </p:bgPr>
     </p:bg>
@@ -6555,9 +6742,7 @@
           <a:prstGeom prst="rect">
             <a:avLst/>
           </a:prstGeom>
-          <a:solidFill>
-            <a:srgbClr val="146B4A"/>
-          </a:solidFill>
+          <a:solidFill>val="007A55"/&gt;</a:solidFill>
           <a:ln>
             <a:noFill/>
           </a:ln>
@@ -6599,9 +6784,7 @@
           <a:prstGeom prst="rect">
             <a:avLst/>
           </a:prstGeom>
-          <a:solidFill>
-            <a:srgbClr val="FFD700"/>
-          </a:solidFill>
+          <a:solidFill>val="F0B429"/&gt;</a:solidFill>
           <a:ln>
             <a:noFill/>
           </a:ln>
@@ -6643,9 +6826,7 @@
           <a:prstGeom prst="rect">
             <a:avLst/>
           </a:prstGeom>
-          <a:solidFill>
-            <a:srgbClr val="FFD700"/>
-          </a:solidFill>
+          <a:solidFill>val="F0B429"/&gt;</a:solidFill>
           <a:ln>
             <a:noFill/>
           </a:ln>
@@ -6687,9 +6868,7 @@
           <a:prstGeom prst="rect">
             <a:avLst/>
           </a:prstGeom>
-          <a:solidFill>
-            <a:srgbClr val="146B4A"/>
-          </a:solidFill>
+          <a:solidFill>val="007A55"/&gt;</a:solidFill>
           <a:ln>
             <a:noFill/>
           </a:ln>
@@ -6742,10 +6921,8 @@
             <a:pPr algn="l"/>
             <a:r>
               <a:rPr sz="2600" b="1" i="0">
-                <a:solidFill>
-                  <a:srgbClr val="FFD700"/>
-                </a:solidFill>
-                <a:latin typeface="Calibri"/>
+                <a:solidFill>val="F0B429"/&gt;</a:solidFill>
+                <a:latin typeface="Poppins"/>
               </a:rPr>
               <a:t>Auto-évaluation (QCM)</a:t>
             </a:r>
@@ -6766,9 +6943,7 @@
           <a:prstGeom prst="rect">
             <a:avLst/>
           </a:prstGeom>
-          <a:solidFill>
-            <a:srgbClr val="146B4A"/>
-          </a:solidFill>
+          <a:solidFill>val="007A55"/&gt;</a:solidFill>
           <a:ln>
             <a:noFill/>
           </a:ln>
@@ -6825,10 +7000,8 @@
             </a:pPr>
             <a:r>
               <a:rPr sz="1500" b="1">
-                <a:solidFill>
-                  <a:srgbClr val="FFFFFF"/>
-                </a:solidFill>
-                <a:latin typeface="Calibri"/>
+                <a:solidFill>val="FFFFFF"/&gt;</a:solidFill>
+                <a:latin typeface="Poppins"/>
               </a:rPr>
               <a:t>1. Qui a inventé le Web ?</a:t>
             </a:r>
@@ -6841,10 +7014,8 @@
             </a:pPr>
             <a:r>
               <a:rPr sz="1400">
-                <a:solidFill>
-                  <a:srgbClr val="BBBBBB"/>
-                </a:solidFill>
-                <a:latin typeface="Calibri"/>
+                <a:solidFill>val="9AA7B6"/&gt;</a:solidFill>
+                <a:latin typeface="Poppins"/>
               </a:rPr>
               <a:t>      a) Bill Gates</a:t>
             </a:r>
@@ -6857,10 +7028,8 @@
             </a:pPr>
             <a:r>
               <a:rPr sz="1400">
-                <a:solidFill>
-                  <a:srgbClr val="BBBBBB"/>
-                </a:solidFill>
-                <a:latin typeface="Calibri"/>
+                <a:solidFill>val="9AA7B6"/&gt;</a:solidFill>
+                <a:latin typeface="Poppins"/>
               </a:rPr>
               <a:t>      b) Tim Berners-Lee</a:t>
             </a:r>
@@ -6873,10 +7042,8 @@
             </a:pPr>
             <a:r>
               <a:rPr sz="1400">
-                <a:solidFill>
-                  <a:srgbClr val="BBBBBB"/>
-                </a:solidFill>
-                <a:latin typeface="Calibri"/>
+                <a:solidFill>val="9AA7B6"/&gt;</a:solidFill>
+                <a:latin typeface="Poppins"/>
               </a:rPr>
               <a:t>      c) Steve Jobs</a:t>
             </a:r>
@@ -6889,10 +7056,8 @@
             </a:pPr>
             <a:r>
               <a:rPr sz="1500" b="1">
-                <a:solidFill>
-                  <a:srgbClr val="FFFFFF"/>
-                </a:solidFill>
-                <a:latin typeface="Calibri"/>
+                <a:solidFill>val="FFFFFF"/&gt;</a:solidFill>
+                <a:latin typeface="Poppins"/>
               </a:rPr>
               <a:t>2. HTML sert à :</a:t>
             </a:r>
@@ -6905,10 +7070,8 @@
             </a:pPr>
             <a:r>
               <a:rPr sz="1400">
-                <a:solidFill>
-                  <a:srgbClr val="BBBBBB"/>
-                </a:solidFill>
-                <a:latin typeface="Calibri"/>
+                <a:solidFill>val="9AA7B6"/&gt;</a:solidFill>
+                <a:latin typeface="Poppins"/>
               </a:rPr>
               <a:t>      a) Styliser la page</a:t>
             </a:r>
@@ -6921,10 +7084,8 @@
             </a:pPr>
             <a:r>
               <a:rPr sz="1400">
-                <a:solidFill>
-                  <a:srgbClr val="BBBBBB"/>
-                </a:solidFill>
-                <a:latin typeface="Calibri"/>
+                <a:solidFill>val="9AA7B6"/&gt;</a:solidFill>
+                <a:latin typeface="Poppins"/>
               </a:rPr>
               <a:t>      b) Structurer le contenu</a:t>
             </a:r>
@@ -6937,10 +7098,8 @@
             </a:pPr>
             <a:r>
               <a:rPr sz="1400">
-                <a:solidFill>
-                  <a:srgbClr val="BBBBBB"/>
-                </a:solidFill>
-                <a:latin typeface="Calibri"/>
+                <a:solidFill>val="9AA7B6"/&gt;</a:solidFill>
+                <a:latin typeface="Poppins"/>
               </a:rPr>
               <a:t>      c) Gérer la base de données</a:t>
             </a:r>
@@ -6953,10 +7112,8 @@
             </a:pPr>
             <a:r>
               <a:rPr sz="1500" b="1">
-                <a:solidFill>
-                  <a:srgbClr val="FFFFFF"/>
-                </a:solidFill>
-                <a:latin typeface="Calibri"/>
+                <a:solidFill>val="FFFFFF"/&gt;</a:solidFill>
+                <a:latin typeface="Poppins"/>
               </a:rPr>
               <a:t>3. Le Web 2.0 se caractérise par :</a:t>
             </a:r>
@@ -6969,10 +7126,8 @@
             </a:pPr>
             <a:r>
               <a:rPr sz="1400">
-                <a:solidFill>
-                  <a:srgbClr val="BBBBBB"/>
-                </a:solidFill>
-                <a:latin typeface="Calibri"/>
+                <a:solidFill>val="9AA7B6"/&gt;</a:solidFill>
+                <a:latin typeface="Poppins"/>
               </a:rPr>
               <a:t>      a) Des pages statiques</a:t>
             </a:r>
@@ -6985,10 +7140,8 @@
             </a:pPr>
             <a:r>
               <a:rPr sz="1400">
-                <a:solidFill>
-                  <a:srgbClr val="BBBBBB"/>
-                </a:solidFill>
-                <a:latin typeface="Calibri"/>
+                <a:solidFill>val="9AA7B6"/&gt;</a:solidFill>
+                <a:latin typeface="Poppins"/>
               </a:rPr>
               <a:t>      b) La participation des utilisateurs</a:t>
             </a:r>
@@ -7001,10 +7154,8 @@
             </a:pPr>
             <a:r>
               <a:rPr sz="1400">
-                <a:solidFill>
-                  <a:srgbClr val="BBBBBB"/>
-                </a:solidFill>
-                <a:latin typeface="Calibri"/>
+                <a:solidFill>val="9AA7B6"/&gt;</a:solidFill>
+                <a:latin typeface="Poppins"/>
               </a:rPr>
               <a:t>      c) L'absence de liens</a:t>
             </a:r>
@@ -7035,6 +7186,47 @@
           </a:prstGeom>
         </p:spPr>
       </p:pic>
+      <p:sp>
+        <p:nvSpPr>
+          <p:cNvPr id="990001" name="Pied de page FLE"/>
+          <p:cNvSpPr>
+            <a:spLocks noGrp="1"/>
+          </p:cNvSpPr>
+          <p:nvPr/>
+        </p:nvSpPr>
+        <p:spPr>
+          <a:xfrm>
+            <a:off x="4343400" y="-329184"/>
+            <a:ext cx="4572000" cy="274320"/>
+          </a:xfrm>
+          <a:prstGeom prst="rect">
+            <a:avLst/>
+          </a:prstGeom>
+        </p:spPr>
+        <p:txBody>
+          <a:bodyPr anchor="b"/>
+          <a:lstStyle/>
+          <a:p>
+            <a:pPr algn="r">
+              <a:defRPr sz="900">
+                <a:solidFill>
+                  <a:srgbClr val="9AA7B6"/>
+                </a:solidFill>
+                <a:latin typeface="Poppins"/>
+              </a:defRPr>
+            </a:pPr>
+            <a:r>
+              <a:rPr lang="fr-FR" sz="900">
+                <a:solidFill>
+                  <a:srgbClr val="9AA7B6"/>
+                </a:solidFill>
+                <a:latin typeface="Poppins"/>
+              </a:rPr>
+              <a:t>Université de Mostaganem — Dr. Madani BELACEL</a:t>
+            </a:r>
+          </a:p>
+        </p:txBody>
+      </p:sp>
     </p:spTree>
   </p:cSld>
   <p:clrMapOvr>
@@ -7048,9 +7240,7 @@
   <p:cSld>
     <p:bg>
       <p:bgPr>
-        <a:solidFill>
-          <a:srgbClr val="0B3D2E"/>
-        </a:solidFill>
+        <a:solidFill>val="004A38"/&gt;</a:solidFill>
         <a:effectLst/>
       </p:bgPr>
     </p:bg>
@@ -7075,9 +7265,7 @@
           <a:prstGeom prst="rect">
             <a:avLst/>
           </a:prstGeom>
-          <a:solidFill>
-            <a:srgbClr val="146B4A"/>
-          </a:solidFill>
+          <a:solidFill>val="007A55"/&gt;</a:solidFill>
           <a:ln>
             <a:noFill/>
           </a:ln>
@@ -7119,9 +7307,7 @@
           <a:prstGeom prst="rect">
             <a:avLst/>
           </a:prstGeom>
-          <a:solidFill>
-            <a:srgbClr val="FFD700"/>
-          </a:solidFill>
+          <a:solidFill>val="F0B429"/&gt;</a:solidFill>
           <a:ln>
             <a:noFill/>
           </a:ln>
@@ -7163,9 +7349,7 @@
           <a:prstGeom prst="rect">
             <a:avLst/>
           </a:prstGeom>
-          <a:solidFill>
-            <a:srgbClr val="FFD700"/>
-          </a:solidFill>
+          <a:solidFill>val="F0B429"/&gt;</a:solidFill>
           <a:ln>
             <a:noFill/>
           </a:ln>
@@ -7207,9 +7391,7 @@
           <a:prstGeom prst="rect">
             <a:avLst/>
           </a:prstGeom>
-          <a:solidFill>
-            <a:srgbClr val="146B4A"/>
-          </a:solidFill>
+          <a:solidFill>val="007A55"/&gt;</a:solidFill>
           <a:ln>
             <a:noFill/>
           </a:ln>
@@ -7262,10 +7444,8 @@
             <a:pPr algn="ctr"/>
             <a:r>
               <a:rPr sz="3000" b="1" i="0">
-                <a:solidFill>
-                  <a:srgbClr val="FFD700"/>
-                </a:solidFill>
-                <a:latin typeface="Calibri"/>
+                <a:solidFill>val="F0B429"/&gt;</a:solidFill>
+                <a:latin typeface="Poppins"/>
               </a:rPr>
               <a:t>Conclusion</a:t>
             </a:r>
@@ -7286,9 +7466,7 @@
           <a:prstGeom prst="rect">
             <a:avLst/>
           </a:prstGeom>
-          <a:solidFill>
-            <a:srgbClr val="146B4A"/>
-          </a:solidFill>
+          <a:solidFill>val="007A55"/&gt;</a:solidFill>
           <a:ln>
             <a:noFill/>
           </a:ln>
@@ -7345,10 +7523,8 @@
             </a:pPr>
             <a:r>
               <a:rPr sz="1800">
-                <a:solidFill>
-                  <a:srgbClr val="FFFFFF"/>
-                </a:solidFill>
-                <a:latin typeface="Calibri"/>
+                <a:solidFill>val="FFFFFF"/&gt;</a:solidFill>
+                <a:latin typeface="Poppins"/>
               </a:rPr>
               <a:t>▪  Le Web est le service le plus utilisé d'Internet.</a:t>
             </a:r>
@@ -7361,10 +7537,8 @@
             </a:pPr>
             <a:r>
               <a:rPr sz="1800">
-                <a:solidFill>
-                  <a:srgbClr val="FFFFFF"/>
-                </a:solidFill>
-                <a:latin typeface="Calibri"/>
+                <a:solidFill>val="FFFFFF"/&gt;</a:solidFill>
+                <a:latin typeface="Poppins"/>
               </a:rPr>
               <a:t>▪  URL, HTTP, HTML/CSS forment le socle technique.</a:t>
             </a:r>
@@ -7377,10 +7551,8 @@
             </a:pPr>
             <a:r>
               <a:rPr sz="1800">
-                <a:solidFill>
-                  <a:srgbClr val="FFFFFF"/>
-                </a:solidFill>
-                <a:latin typeface="Calibri"/>
+                <a:solidFill>val="FFFFFF"/&gt;</a:solidFill>
+                <a:latin typeface="Poppins"/>
               </a:rPr>
               <a:t>▪  L'esprit critique reste essentiel face à l'information en ligne.</a:t>
             </a:r>
@@ -7393,10 +7565,8 @@
             </a:pPr>
             <a:r>
               <a:rPr sz="1800">
-                <a:solidFill>
-                  <a:srgbClr val="FFFFFF"/>
-                </a:solidFill>
-                <a:latin typeface="Calibri"/>
+                <a:solidFill>val="FFFFFF"/&gt;</a:solidFill>
+                <a:latin typeface="Poppins"/>
               </a:rPr>
               <a:t>▪  Prochain cours : les réseaux informatiques.</a:t>
             </a:r>
@@ -7427,6 +7597,47 @@
           </a:prstGeom>
         </p:spPr>
       </p:pic>
+      <p:sp>
+        <p:nvSpPr>
+          <p:cNvPr id="990001" name="Pied de page FLE"/>
+          <p:cNvSpPr>
+            <a:spLocks noGrp="1"/>
+          </p:cNvSpPr>
+          <p:nvPr/>
+        </p:nvSpPr>
+        <p:spPr>
+          <a:xfrm>
+            <a:off x="4343400" y="-329184"/>
+            <a:ext cx="4572000" cy="274320"/>
+          </a:xfrm>
+          <a:prstGeom prst="rect">
+            <a:avLst/>
+          </a:prstGeom>
+        </p:spPr>
+        <p:txBody>
+          <a:bodyPr anchor="b"/>
+          <a:lstStyle/>
+          <a:p>
+            <a:pPr algn="r">
+              <a:defRPr sz="900">
+                <a:solidFill>
+                  <a:srgbClr val="9AA7B6"/>
+                </a:solidFill>
+                <a:latin typeface="Poppins"/>
+              </a:defRPr>
+            </a:pPr>
+            <a:r>
+              <a:rPr lang="fr-FR" sz="900">
+                <a:solidFill>
+                  <a:srgbClr val="9AA7B6"/>
+                </a:solidFill>
+                <a:latin typeface="Poppins"/>
+              </a:rPr>
+              <a:t>Université de Mostaganem — Dr. Madani BELACEL</a:t>
+            </a:r>
+          </a:p>
+        </p:txBody>
+      </p:sp>
     </p:spTree>
   </p:cSld>
   <p:clrMapOvr>
@@ -7440,9 +7651,7 @@
   <p:cSld>
     <p:bg>
       <p:bgPr>
-        <a:solidFill>
-          <a:srgbClr val="0B3D2E"/>
-        </a:solidFill>
+        <a:solidFill>val="004A38"/&gt;</a:solidFill>
         <a:effectLst/>
       </p:bgPr>
     </p:bg>
@@ -7467,9 +7676,7 @@
           <a:prstGeom prst="rect">
             <a:avLst/>
           </a:prstGeom>
-          <a:solidFill>
-            <a:srgbClr val="146B4A"/>
-          </a:solidFill>
+          <a:solidFill>val="007A55"/&gt;</a:solidFill>
           <a:ln>
             <a:noFill/>
           </a:ln>
@@ -7511,9 +7718,7 @@
           <a:prstGeom prst="rect">
             <a:avLst/>
           </a:prstGeom>
-          <a:solidFill>
-            <a:srgbClr val="FFD700"/>
-          </a:solidFill>
+          <a:solidFill>val="F0B429"/&gt;</a:solidFill>
           <a:ln>
             <a:noFill/>
           </a:ln>
@@ -7555,9 +7760,7 @@
           <a:prstGeom prst="rect">
             <a:avLst/>
           </a:prstGeom>
-          <a:solidFill>
-            <a:srgbClr val="FFD700"/>
-          </a:solidFill>
+          <a:solidFill>val="F0B429"/&gt;</a:solidFill>
           <a:ln>
             <a:noFill/>
           </a:ln>
@@ -7599,9 +7802,7 @@
           <a:prstGeom prst="rect">
             <a:avLst/>
           </a:prstGeom>
-          <a:solidFill>
-            <a:srgbClr val="146B4A"/>
-          </a:solidFill>
+          <a:solidFill>val="007A55"/&gt;</a:solidFill>
           <a:ln>
             <a:noFill/>
           </a:ln>
@@ -7654,10 +7855,8 @@
             <a:pPr algn="ctr"/>
             <a:r>
               <a:rPr sz="3200" b="1" i="0">
-                <a:solidFill>
-                  <a:srgbClr val="FFD700"/>
-                </a:solidFill>
-                <a:latin typeface="Calibri"/>
+                <a:solidFill>val="F0B429"/&gt;</a:solidFill>
+                <a:latin typeface="Poppins"/>
               </a:rPr>
               <a:t>Plan du cours</a:t>
             </a:r>
@@ -7693,10 +7892,8 @@
             </a:pPr>
             <a:r>
               <a:rPr sz="1900">
-                <a:solidFill>
-                  <a:srgbClr val="FFFFFF"/>
-                </a:solidFill>
-                <a:latin typeface="Calibri"/>
+                <a:solidFill>val="FFFFFF"/&gt;</a:solidFill>
+                <a:latin typeface="Poppins"/>
               </a:rPr>
               <a:t>▪  1. Web ≠ Internet</a:t>
             </a:r>
@@ -7709,10 +7906,8 @@
             </a:pPr>
             <a:r>
               <a:rPr sz="1900">
-                <a:solidFill>
-                  <a:srgbClr val="FFFFFF"/>
-                </a:solidFill>
-                <a:latin typeface="Calibri"/>
+                <a:solidFill>val="FFFFFF"/&gt;</a:solidFill>
+                <a:latin typeface="Poppins"/>
               </a:rPr>
               <a:t>▪  2. Concepts fondamentaux</a:t>
             </a:r>
@@ -7725,10 +7920,8 @@
             </a:pPr>
             <a:r>
               <a:rPr sz="1900">
-                <a:solidFill>
-                  <a:srgbClr val="FFFFFF"/>
-                </a:solidFill>
-                <a:latin typeface="Calibri"/>
+                <a:solidFill>val="FFFFFF"/&gt;</a:solidFill>
+                <a:latin typeface="Poppins"/>
               </a:rPr>
               <a:t>▪  3. Langages du Web</a:t>
             </a:r>
@@ -7741,10 +7934,8 @@
             </a:pPr>
             <a:r>
               <a:rPr sz="1900">
-                <a:solidFill>
-                  <a:srgbClr val="FFFFFF"/>
-                </a:solidFill>
-                <a:latin typeface="Calibri"/>
+                <a:solidFill>val="FFFFFF"/&gt;</a:solidFill>
+                <a:latin typeface="Poppins"/>
               </a:rPr>
               <a:t>▪  4. Hébergement et publication</a:t>
             </a:r>
@@ -7757,10 +7948,8 @@
             </a:pPr>
             <a:r>
               <a:rPr sz="1900">
-                <a:solidFill>
-                  <a:srgbClr val="FFFFFF"/>
-                </a:solidFill>
-                <a:latin typeface="Calibri"/>
+                <a:solidFill>val="FFFFFF"/&gt;</a:solidFill>
+                <a:latin typeface="Poppins"/>
               </a:rPr>
               <a:t>▪  5. Du Web 1.0 au Web 3.0</a:t>
             </a:r>
@@ -7773,10 +7962,8 @@
             </a:pPr>
             <a:r>
               <a:rPr sz="1900">
-                <a:solidFill>
-                  <a:srgbClr val="FFFFFF"/>
-                </a:solidFill>
-                <a:latin typeface="Calibri"/>
+                <a:solidFill>val="FFFFFF"/&gt;</a:solidFill>
+                <a:latin typeface="Poppins"/>
               </a:rPr>
               <a:t>▪  6. Navigation efficace</a:t>
             </a:r>
@@ -7789,12 +7976,51 @@
             </a:pPr>
             <a:r>
               <a:rPr sz="1900">
-                <a:solidFill>
-                  <a:srgbClr val="FFFFFF"/>
-                </a:solidFill>
-                <a:latin typeface="Calibri"/>
+                <a:solidFill>val="FFFFFF"/&gt;</a:solidFill>
+                <a:latin typeface="Poppins"/>
               </a:rPr>
               <a:t>▪  7. Qualité et fiabilité des contenus</a:t>
+            </a:r>
+          </a:p>
+        </p:txBody>
+      </p:sp>
+      <p:sp>
+        <p:nvSpPr>
+          <p:cNvPr id="990001" name="Pied de page FLE"/>
+          <p:cNvSpPr>
+            <a:spLocks noGrp="1"/>
+          </p:cNvSpPr>
+          <p:nvPr/>
+        </p:nvSpPr>
+        <p:spPr>
+          <a:xfrm>
+            <a:off x="4343400" y="-329184"/>
+            <a:ext cx="4572000" cy="274320"/>
+          </a:xfrm>
+          <a:prstGeom prst="rect">
+            <a:avLst/>
+          </a:prstGeom>
+        </p:spPr>
+        <p:txBody>
+          <a:bodyPr anchor="b"/>
+          <a:lstStyle/>
+          <a:p>
+            <a:pPr algn="r">
+              <a:defRPr sz="900">
+                <a:solidFill>
+                  <a:srgbClr val="9AA7B6"/>
+                </a:solidFill>
+                <a:latin typeface="Poppins"/>
+              </a:defRPr>
+            </a:pPr>
+            <a:r>
+              <a:rPr lang="fr-FR" sz="900">
+                <a:solidFill>
+                  <a:srgbClr val="9AA7B6"/>
+                </a:solidFill>
+                <a:latin typeface="Poppins"/>
+              </a:rPr>
+              <a:t>Université de Mostaganem — Dr. Madani BELACEL</a:t>
             </a:r>
           </a:p>
         </p:txBody>
@@ -7812,9 +8038,7 @@
   <p:cSld>
     <p:bg>
       <p:bgPr>
-        <a:solidFill>
-          <a:srgbClr val="0B3D2E"/>
-        </a:solidFill>
+        <a:solidFill>val="004A38"/&gt;</a:solidFill>
         <a:effectLst/>
       </p:bgPr>
     </p:bg>
@@ -7839,9 +8063,7 @@
           <a:prstGeom prst="rect">
             <a:avLst/>
           </a:prstGeom>
-          <a:solidFill>
-            <a:srgbClr val="146B4A"/>
-          </a:solidFill>
+          <a:solidFill>val="007A55"/&gt;</a:solidFill>
           <a:ln>
             <a:noFill/>
           </a:ln>
@@ -7883,9 +8105,7 @@
           <a:prstGeom prst="rect">
             <a:avLst/>
           </a:prstGeom>
-          <a:solidFill>
-            <a:srgbClr val="FFD700"/>
-          </a:solidFill>
+          <a:solidFill>val="F0B429"/&gt;</a:solidFill>
           <a:ln>
             <a:noFill/>
           </a:ln>
@@ -7927,9 +8147,7 @@
           <a:prstGeom prst="rect">
             <a:avLst/>
           </a:prstGeom>
-          <a:solidFill>
-            <a:srgbClr val="FFD700"/>
-          </a:solidFill>
+          <a:solidFill>val="F0B429"/&gt;</a:solidFill>
           <a:ln>
             <a:noFill/>
           </a:ln>
@@ -7971,9 +8189,7 @@
           <a:prstGeom prst="rect">
             <a:avLst/>
           </a:prstGeom>
-          <a:solidFill>
-            <a:srgbClr val="146B4A"/>
-          </a:solidFill>
+          <a:solidFill>val="007A55"/&gt;</a:solidFill>
           <a:ln>
             <a:noFill/>
           </a:ln>
@@ -8026,10 +8242,8 @@
             <a:pPr algn="l"/>
             <a:r>
               <a:rPr sz="3000" b="1" i="0">
-                <a:solidFill>
-                  <a:srgbClr val="FFD700"/>
-                </a:solidFill>
-                <a:latin typeface="Calibri"/>
+                <a:solidFill>val="F0B429"/&gt;</a:solidFill>
+                <a:latin typeface="Poppins"/>
               </a:rPr>
               <a:t>Références</a:t>
             </a:r>
@@ -8050,9 +8264,7 @@
           <a:prstGeom prst="rect">
             <a:avLst/>
           </a:prstGeom>
-          <a:solidFill>
-            <a:srgbClr val="146B4A"/>
-          </a:solidFill>
+          <a:solidFill>val="007A55"/&gt;</a:solidFill>
           <a:ln>
             <a:noFill/>
           </a:ln>
@@ -8109,10 +8321,8 @@
             </a:pPr>
             <a:r>
               <a:rPr sz="1500">
-                <a:solidFill>
-                  <a:srgbClr val="BBBBBB"/>
-                </a:solidFill>
-                <a:latin typeface="Calibri"/>
+                <a:solidFill>val="9AA7B6"/&gt;</a:solidFill>
+                <a:latin typeface="Poppins"/>
               </a:rPr>
               <a:t>- T. Berners-Lee, « Weaving the Web », HarperBusiness.</a:t>
             </a:r>
@@ -8125,10 +8335,8 @@
             </a:pPr>
             <a:r>
               <a:rPr sz="1500">
-                <a:solidFill>
-                  <a:srgbClr val="BBBBBB"/>
-                </a:solidFill>
-                <a:latin typeface="Calibri"/>
+                <a:solidFill>val="9AA7B6"/&gt;</a:solidFill>
+                <a:latin typeface="Poppins"/>
               </a:rPr>
               <a:t>- MDN Web Docs (developer.mozilla.org).</a:t>
             </a:r>
@@ -8141,10 +8349,8 @@
             </a:pPr>
             <a:r>
               <a:rPr sz="1500">
-                <a:solidFill>
-                  <a:srgbClr val="BBBBBB"/>
-                </a:solidFill>
-                <a:latin typeface="Calibri"/>
+                <a:solidFill>val="9AA7B6"/&gt;</a:solidFill>
+                <a:latin typeface="Poppins"/>
               </a:rPr>
               <a:t>- Supports de cours Module TIC, Université de Mostaganem.</a:t>
             </a:r>
@@ -8157,10 +8363,8 @@
             </a:pPr>
             <a:r>
               <a:rPr sz="1500">
-                <a:solidFill>
-                  <a:srgbClr val="BBBBBB"/>
-                </a:solidFill>
-                <a:latin typeface="Calibri"/>
+                <a:solidFill>val="9AA7B6"/&gt;</a:solidFill>
+                <a:latin typeface="Poppins"/>
               </a:rPr>
               <a:t>- www.w3.org - consortium du Web.</a:t>
             </a:r>
@@ -8191,6 +8395,47 @@
           </a:prstGeom>
         </p:spPr>
       </p:pic>
+      <p:sp>
+        <p:nvSpPr>
+          <p:cNvPr id="990001" name="Pied de page FLE"/>
+          <p:cNvSpPr>
+            <a:spLocks noGrp="1"/>
+          </p:cNvSpPr>
+          <p:nvPr/>
+        </p:nvSpPr>
+        <p:spPr>
+          <a:xfrm>
+            <a:off x="4343400" y="-329184"/>
+            <a:ext cx="4572000" cy="274320"/>
+          </a:xfrm>
+          <a:prstGeom prst="rect">
+            <a:avLst/>
+          </a:prstGeom>
+        </p:spPr>
+        <p:txBody>
+          <a:bodyPr anchor="b"/>
+          <a:lstStyle/>
+          <a:p>
+            <a:pPr algn="r">
+              <a:defRPr sz="900">
+                <a:solidFill>
+                  <a:srgbClr val="9AA7B6"/>
+                </a:solidFill>
+                <a:latin typeface="Poppins"/>
+              </a:defRPr>
+            </a:pPr>
+            <a:r>
+              <a:rPr lang="fr-FR" sz="900">
+                <a:solidFill>
+                  <a:srgbClr val="9AA7B6"/>
+                </a:solidFill>
+                <a:latin typeface="Poppins"/>
+              </a:rPr>
+              <a:t>Université de Mostaganem — Dr. Madani BELACEL</a:t>
+            </a:r>
+          </a:p>
+        </p:txBody>
+      </p:sp>
     </p:spTree>
   </p:cSld>
   <p:clrMapOvr>
@@ -8204,9 +8449,7 @@
   <p:cSld>
     <p:bg>
       <p:bgPr>
-        <a:solidFill>
-          <a:srgbClr val="0B3D2E"/>
-        </a:solidFill>
+        <a:solidFill>val="004A38"/&gt;</a:solidFill>
         <a:effectLst/>
       </p:bgPr>
     </p:bg>
@@ -8231,9 +8474,7 @@
           <a:prstGeom prst="rect">
             <a:avLst/>
           </a:prstGeom>
-          <a:solidFill>
-            <a:srgbClr val="146B4A"/>
-          </a:solidFill>
+          <a:solidFill>val="007A55"/&gt;</a:solidFill>
           <a:ln>
             <a:noFill/>
           </a:ln>
@@ -8275,9 +8516,7 @@
           <a:prstGeom prst="rect">
             <a:avLst/>
           </a:prstGeom>
-          <a:solidFill>
-            <a:srgbClr val="FFD700"/>
-          </a:solidFill>
+          <a:solidFill>val="F0B429"/&gt;</a:solidFill>
           <a:ln>
             <a:noFill/>
           </a:ln>
@@ -8319,9 +8558,7 @@
           <a:prstGeom prst="rect">
             <a:avLst/>
           </a:prstGeom>
-          <a:solidFill>
-            <a:srgbClr val="FFD700"/>
-          </a:solidFill>
+          <a:solidFill>val="F0B429"/&gt;</a:solidFill>
           <a:ln>
             <a:noFill/>
           </a:ln>
@@ -8363,9 +8600,7 @@
           <a:prstGeom prst="rect">
             <a:avLst/>
           </a:prstGeom>
-          <a:solidFill>
-            <a:srgbClr val="146B4A"/>
-          </a:solidFill>
+          <a:solidFill>val="007A55"/&gt;</a:solidFill>
           <a:ln>
             <a:noFill/>
           </a:ln>
@@ -8407,9 +8642,7 @@
           <a:prstGeom prst="rect">
             <a:avLst/>
           </a:prstGeom>
-          <a:solidFill>
-            <a:srgbClr val="FFD700"/>
-          </a:solidFill>
+          <a:solidFill>val="F0B429"/&gt;</a:solidFill>
           <a:ln>
             <a:noFill/>
           </a:ln>
@@ -8462,10 +8695,8 @@
             <a:pPr algn="ctr"/>
             <a:r>
               <a:rPr sz="3800" b="1" i="0">
-                <a:solidFill>
-                  <a:srgbClr val="FFD700"/>
-                </a:solidFill>
-                <a:latin typeface="Calibri"/>
+                <a:solidFill>val="F0B429"/&gt;</a:solidFill>
+                <a:latin typeface="Poppins"/>
               </a:rPr>
               <a:t>Merci de votre attention !</a:t>
             </a:r>
@@ -8497,10 +8728,8 @@
             <a:pPr algn="ctr"/>
             <a:r>
               <a:rPr sz="2600" b="0" i="0">
-                <a:solidFill>
-                  <a:srgbClr val="FFFFFF"/>
-                </a:solidFill>
-                <a:latin typeface="Calibri"/>
+                <a:solidFill>val="FFFFFF"/&gt;</a:solidFill>
+                <a:latin typeface="Poppins"/>
               </a:rPr>
               <a:t>Des questions ?</a:t>
             </a:r>
@@ -8532,10 +8761,8 @@
             <a:pPr algn="ctr"/>
             <a:r>
               <a:rPr sz="1600" b="0" i="0">
-                <a:solidFill>
-                  <a:srgbClr val="BBBBBB"/>
-                </a:solidFill>
-                <a:latin typeface="Calibri"/>
+                <a:solidFill>val="9AA7B6"/&gt;</a:solidFill>
+                <a:latin typeface="Poppins"/>
               </a:rPr>
               <a:t>Dr. BELACEL Madani</a:t>
             </a:r>
@@ -8566,6 +8793,47 @@
           </a:prstGeom>
         </p:spPr>
       </p:pic>
+      <p:sp>
+        <p:nvSpPr>
+          <p:cNvPr id="990001" name="Pied de page FLE"/>
+          <p:cNvSpPr>
+            <a:spLocks noGrp="1"/>
+          </p:cNvSpPr>
+          <p:nvPr/>
+        </p:nvSpPr>
+        <p:spPr>
+          <a:xfrm>
+            <a:off x="4343400" y="-329184"/>
+            <a:ext cx="4572000" cy="274320"/>
+          </a:xfrm>
+          <a:prstGeom prst="rect">
+            <a:avLst/>
+          </a:prstGeom>
+        </p:spPr>
+        <p:txBody>
+          <a:bodyPr anchor="b"/>
+          <a:lstStyle/>
+          <a:p>
+            <a:pPr algn="r">
+              <a:defRPr sz="900">
+                <a:solidFill>
+                  <a:srgbClr val="9AA7B6"/>
+                </a:solidFill>
+                <a:latin typeface="Poppins"/>
+              </a:defRPr>
+            </a:pPr>
+            <a:r>
+              <a:rPr lang="fr-FR" sz="900">
+                <a:solidFill>
+                  <a:srgbClr val="9AA7B6"/>
+                </a:solidFill>
+                <a:latin typeface="Poppins"/>
+              </a:rPr>
+              <a:t>Université de Mostaganem — Dr. Madani BELACEL</a:t>
+            </a:r>
+          </a:p>
+        </p:txBody>
+      </p:sp>
     </p:spTree>
   </p:cSld>
   <p:clrMapOvr>
@@ -8579,9 +8847,7 @@
   <p:cSld>
     <p:bg>
       <p:bgPr>
-        <a:solidFill>
-          <a:srgbClr val="0B3D2E"/>
-        </a:solidFill>
+        <a:solidFill>val="004A38"/&gt;</a:solidFill>
         <a:effectLst/>
       </p:bgPr>
     </p:bg>
@@ -8606,9 +8872,7 @@
           <a:prstGeom prst="rect">
             <a:avLst/>
           </a:prstGeom>
-          <a:solidFill>
-            <a:srgbClr val="146B4A"/>
-          </a:solidFill>
+          <a:solidFill>val="007A55"/&gt;</a:solidFill>
           <a:ln>
             <a:noFill/>
           </a:ln>
@@ -8650,9 +8914,7 @@
           <a:prstGeom prst="rect">
             <a:avLst/>
           </a:prstGeom>
-          <a:solidFill>
-            <a:srgbClr val="FFD700"/>
-          </a:solidFill>
+          <a:solidFill>val="F0B429"/&gt;</a:solidFill>
           <a:ln>
             <a:noFill/>
           </a:ln>
@@ -8694,9 +8956,7 @@
           <a:prstGeom prst="rect">
             <a:avLst/>
           </a:prstGeom>
-          <a:solidFill>
-            <a:srgbClr val="FFD700"/>
-          </a:solidFill>
+          <a:solidFill>val="F0B429"/&gt;</a:solidFill>
           <a:ln>
             <a:noFill/>
           </a:ln>
@@ -8738,9 +8998,7 @@
           <a:prstGeom prst="rect">
             <a:avLst/>
           </a:prstGeom>
-          <a:solidFill>
-            <a:srgbClr val="146B4A"/>
-          </a:solidFill>
+          <a:solidFill>val="007A55"/&gt;</a:solidFill>
           <a:ln>
             <a:noFill/>
           </a:ln>
@@ -8782,9 +9040,7 @@
           <a:prstGeom prst="rect">
             <a:avLst/>
           </a:prstGeom>
-          <a:solidFill>
-            <a:srgbClr val="146B4A"/>
-          </a:solidFill>
+          <a:solidFill>val="007A55"/&gt;</a:solidFill>
           <a:ln>
             <a:noFill/>
           </a:ln>
@@ -8837,10 +9093,8 @@
             <a:pPr algn="ctr"/>
             <a:r>
               <a:rPr sz="2200" b="1" i="0">
-                <a:solidFill>
-                  <a:srgbClr val="BBBBBB"/>
-                </a:solidFill>
-                <a:latin typeface="Calibri"/>
+                <a:solidFill>val="9AA7B6"/&gt;</a:solidFill>
+                <a:latin typeface="Poppins"/>
               </a:rPr>
               <a:t>Section 1</a:t>
             </a:r>
@@ -8872,10 +9126,8 @@
             <a:pPr algn="ctr"/>
             <a:r>
               <a:rPr sz="2800" b="1" i="0">
-                <a:solidFill>
-                  <a:srgbClr val="FFD700"/>
-                </a:solidFill>
-                <a:latin typeface="Calibri"/>
+                <a:solidFill>val="F0B429"/&gt;</a:solidFill>
+                <a:latin typeface="Poppins"/>
               </a:rPr>
               <a:t>Web ≠ Internet</a:t>
             </a:r>
@@ -8906,6 +9158,47 @@
           </a:prstGeom>
         </p:spPr>
       </p:pic>
+      <p:sp>
+        <p:nvSpPr>
+          <p:cNvPr id="990001" name="Pied de page FLE"/>
+          <p:cNvSpPr>
+            <a:spLocks noGrp="1"/>
+          </p:cNvSpPr>
+          <p:nvPr/>
+        </p:nvSpPr>
+        <p:spPr>
+          <a:xfrm>
+            <a:off x="4343400" y="-329184"/>
+            <a:ext cx="4572000" cy="274320"/>
+          </a:xfrm>
+          <a:prstGeom prst="rect">
+            <a:avLst/>
+          </a:prstGeom>
+        </p:spPr>
+        <p:txBody>
+          <a:bodyPr anchor="b"/>
+          <a:lstStyle/>
+          <a:p>
+            <a:pPr algn="r">
+              <a:defRPr sz="900">
+                <a:solidFill>
+                  <a:srgbClr val="9AA7B6"/>
+                </a:solidFill>
+                <a:latin typeface="Poppins"/>
+              </a:defRPr>
+            </a:pPr>
+            <a:r>
+              <a:rPr lang="fr-FR" sz="900">
+                <a:solidFill>
+                  <a:srgbClr val="9AA7B6"/>
+                </a:solidFill>
+                <a:latin typeface="Poppins"/>
+              </a:rPr>
+              <a:t>Université de Mostaganem — Dr. Madani BELACEL</a:t>
+            </a:r>
+          </a:p>
+        </p:txBody>
+      </p:sp>
     </p:spTree>
   </p:cSld>
   <p:clrMapOvr>
@@ -8919,9 +9212,7 @@
   <p:cSld>
     <p:bg>
       <p:bgPr>
-        <a:solidFill>
-          <a:srgbClr val="0B3D2E"/>
-        </a:solidFill>
+        <a:solidFill>val="004A38"/&gt;</a:solidFill>
         <a:effectLst/>
       </p:bgPr>
     </p:bg>
@@ -8946,9 +9237,7 @@
           <a:prstGeom prst="rect">
             <a:avLst/>
           </a:prstGeom>
-          <a:solidFill>
-            <a:srgbClr val="146B4A"/>
-          </a:solidFill>
+          <a:solidFill>val="007A55"/&gt;</a:solidFill>
           <a:ln>
             <a:noFill/>
           </a:ln>
@@ -8990,9 +9279,7 @@
           <a:prstGeom prst="rect">
             <a:avLst/>
           </a:prstGeom>
-          <a:solidFill>
-            <a:srgbClr val="FFD700"/>
-          </a:solidFill>
+          <a:solidFill>val="F0B429"/&gt;</a:solidFill>
           <a:ln>
             <a:noFill/>
           </a:ln>
@@ -9034,9 +9321,7 @@
           <a:prstGeom prst="rect">
             <a:avLst/>
           </a:prstGeom>
-          <a:solidFill>
-            <a:srgbClr val="FFD700"/>
-          </a:solidFill>
+          <a:solidFill>val="F0B429"/&gt;</a:solidFill>
           <a:ln>
             <a:noFill/>
           </a:ln>
@@ -9078,9 +9363,7 @@
           <a:prstGeom prst="rect">
             <a:avLst/>
           </a:prstGeom>
-          <a:solidFill>
-            <a:srgbClr val="146B4A"/>
-          </a:solidFill>
+          <a:solidFill>val="007A55"/&gt;</a:solidFill>
           <a:ln>
             <a:noFill/>
           </a:ln>
@@ -9133,10 +9416,8 @@
             <a:pPr algn="l"/>
             <a:r>
               <a:rPr sz="2400" b="1" i="0">
-                <a:solidFill>
-                  <a:srgbClr val="FFD700"/>
-                </a:solidFill>
-                <a:latin typeface="Calibri"/>
+                <a:solidFill>val="F0B429"/&gt;</a:solidFill>
+                <a:latin typeface="Poppins"/>
               </a:rPr>
               <a:t>1 - Web ≠ Internet</a:t>
             </a:r>
@@ -9157,9 +9438,7 @@
           <a:prstGeom prst="rect">
             <a:avLst/>
           </a:prstGeom>
-          <a:solidFill>
-            <a:srgbClr val="146B4A"/>
-          </a:solidFill>
+          <a:solidFill>val="007A55"/&gt;</a:solidFill>
           <a:ln>
             <a:noFill/>
           </a:ln>
@@ -9216,10 +9495,8 @@
             </a:pPr>
             <a:r>
               <a:rPr sz="1800">
-                <a:solidFill>
-                  <a:srgbClr val="FFFFFF"/>
-                </a:solidFill>
-                <a:latin typeface="Calibri"/>
+                <a:solidFill>val="FFFFFF"/&gt;</a:solidFill>
+                <a:latin typeface="Poppins"/>
               </a:rPr>
               <a:t>▪  Internet = infrastructure réseau mondiale.</a:t>
             </a:r>
@@ -9232,10 +9509,8 @@
             </a:pPr>
             <a:r>
               <a:rPr sz="1800">
-                <a:solidFill>
-                  <a:srgbClr val="FFFFFF"/>
-                </a:solidFill>
-                <a:latin typeface="Calibri"/>
+                <a:solidFill>val="FFFFFF"/&gt;</a:solidFill>
+                <a:latin typeface="Poppins"/>
               </a:rPr>
               <a:t>▪  Web = service fonctionnant SUR Internet (hypertexte).</a:t>
             </a:r>
@@ -9248,10 +9523,8 @@
             </a:pPr>
             <a:r>
               <a:rPr sz="1800">
-                <a:solidFill>
-                  <a:srgbClr val="FFFFFF"/>
-                </a:solidFill>
-                <a:latin typeface="Calibri"/>
+                <a:solidFill>val="FFFFFF"/&gt;</a:solidFill>
+                <a:latin typeface="Poppins"/>
               </a:rPr>
               <a:t>▪  Autres services : e-mail, FTP, messagerie instantanée.</a:t>
             </a:r>
@@ -9264,10 +9537,8 @@
             </a:pPr>
             <a:r>
               <a:rPr sz="1800">
-                <a:solidFill>
-                  <a:srgbClr val="FFFFFF"/>
-                </a:solidFill>
-                <a:latin typeface="Calibri"/>
+                <a:solidFill>val="FFFFFF"/&gt;</a:solidFill>
+                <a:latin typeface="Poppins"/>
               </a:rPr>
               <a:t>▪  Inventé par Tim Berners-Lee au CERN en 1989-1991.</a:t>
             </a:r>
@@ -9298,6 +9569,47 @@
           </a:prstGeom>
         </p:spPr>
       </p:pic>
+      <p:sp>
+        <p:nvSpPr>
+          <p:cNvPr id="990001" name="Pied de page FLE"/>
+          <p:cNvSpPr>
+            <a:spLocks noGrp="1"/>
+          </p:cNvSpPr>
+          <p:nvPr/>
+        </p:nvSpPr>
+        <p:spPr>
+          <a:xfrm>
+            <a:off x="4343400" y="-329184"/>
+            <a:ext cx="4572000" cy="274320"/>
+          </a:xfrm>
+          <a:prstGeom prst="rect">
+            <a:avLst/>
+          </a:prstGeom>
+        </p:spPr>
+        <p:txBody>
+          <a:bodyPr anchor="b"/>
+          <a:lstStyle/>
+          <a:p>
+            <a:pPr algn="r">
+              <a:defRPr sz="900">
+                <a:solidFill>
+                  <a:srgbClr val="9AA7B6"/>
+                </a:solidFill>
+                <a:latin typeface="Poppins"/>
+              </a:defRPr>
+            </a:pPr>
+            <a:r>
+              <a:rPr lang="fr-FR" sz="900">
+                <a:solidFill>
+                  <a:srgbClr val="9AA7B6"/>
+                </a:solidFill>
+                <a:latin typeface="Poppins"/>
+              </a:rPr>
+              <a:t>Université de Mostaganem — Dr. Madani BELACEL</a:t>
+            </a:r>
+          </a:p>
+        </p:txBody>
+      </p:sp>
     </p:spTree>
   </p:cSld>
   <p:clrMapOvr>
@@ -9311,9 +9623,7 @@
   <p:cSld>
     <p:bg>
       <p:bgPr>
-        <a:solidFill>
-          <a:srgbClr val="0B3D2E"/>
-        </a:solidFill>
+        <a:solidFill>val="004A38"/&gt;</a:solidFill>
         <a:effectLst/>
       </p:bgPr>
     </p:bg>
@@ -9338,9 +9648,7 @@
           <a:prstGeom prst="rect">
             <a:avLst/>
           </a:prstGeom>
-          <a:solidFill>
-            <a:srgbClr val="146B4A"/>
-          </a:solidFill>
+          <a:solidFill>val="007A55"/&gt;</a:solidFill>
           <a:ln>
             <a:noFill/>
           </a:ln>
@@ -9382,9 +9690,7 @@
           <a:prstGeom prst="rect">
             <a:avLst/>
           </a:prstGeom>
-          <a:solidFill>
-            <a:srgbClr val="FFD700"/>
-          </a:solidFill>
+          <a:solidFill>val="F0B429"/&gt;</a:solidFill>
           <a:ln>
             <a:noFill/>
           </a:ln>
@@ -9426,9 +9732,7 @@
           <a:prstGeom prst="rect">
             <a:avLst/>
           </a:prstGeom>
-          <a:solidFill>
-            <a:srgbClr val="FFD700"/>
-          </a:solidFill>
+          <a:solidFill>val="F0B429"/&gt;</a:solidFill>
           <a:ln>
             <a:noFill/>
           </a:ln>
@@ -9470,9 +9774,7 @@
           <a:prstGeom prst="rect">
             <a:avLst/>
           </a:prstGeom>
-          <a:solidFill>
-            <a:srgbClr val="146B4A"/>
-          </a:solidFill>
+          <a:solidFill>val="007A55"/&gt;</a:solidFill>
           <a:ln>
             <a:noFill/>
           </a:ln>
@@ -9514,9 +9816,7 @@
           <a:prstGeom prst="rect">
             <a:avLst/>
           </a:prstGeom>
-          <a:solidFill>
-            <a:srgbClr val="146B4A"/>
-          </a:solidFill>
+          <a:solidFill>val="007A55"/&gt;</a:solidFill>
           <a:ln>
             <a:noFill/>
           </a:ln>
@@ -9569,10 +9869,8 @@
             <a:pPr algn="ctr"/>
             <a:r>
               <a:rPr sz="2200" b="1" i="0">
-                <a:solidFill>
-                  <a:srgbClr val="BBBBBB"/>
-                </a:solidFill>
-                <a:latin typeface="Calibri"/>
+                <a:solidFill>val="9AA7B6"/&gt;</a:solidFill>
+                <a:latin typeface="Poppins"/>
               </a:rPr>
               <a:t>Section 2</a:t>
             </a:r>
@@ -9604,10 +9902,8 @@
             <a:pPr algn="ctr"/>
             <a:r>
               <a:rPr sz="2800" b="1" i="0">
-                <a:solidFill>
-                  <a:srgbClr val="FFD700"/>
-                </a:solidFill>
-                <a:latin typeface="Calibri"/>
+                <a:solidFill>val="F0B429"/&gt;</a:solidFill>
+                <a:latin typeface="Poppins"/>
               </a:rPr>
               <a:t>Concepts fondamentaux</a:t>
             </a:r>
@@ -9638,6 +9934,47 @@
           </a:prstGeom>
         </p:spPr>
       </p:pic>
+      <p:sp>
+        <p:nvSpPr>
+          <p:cNvPr id="990001" name="Pied de page FLE"/>
+          <p:cNvSpPr>
+            <a:spLocks noGrp="1"/>
+          </p:cNvSpPr>
+          <p:nvPr/>
+        </p:nvSpPr>
+        <p:spPr>
+          <a:xfrm>
+            <a:off x="4343400" y="-329184"/>
+            <a:ext cx="4572000" cy="274320"/>
+          </a:xfrm>
+          <a:prstGeom prst="rect">
+            <a:avLst/>
+          </a:prstGeom>
+        </p:spPr>
+        <p:txBody>
+          <a:bodyPr anchor="b"/>
+          <a:lstStyle/>
+          <a:p>
+            <a:pPr algn="r">
+              <a:defRPr sz="900">
+                <a:solidFill>
+                  <a:srgbClr val="9AA7B6"/>
+                </a:solidFill>
+                <a:latin typeface="Poppins"/>
+              </a:defRPr>
+            </a:pPr>
+            <a:r>
+              <a:rPr lang="fr-FR" sz="900">
+                <a:solidFill>
+                  <a:srgbClr val="9AA7B6"/>
+                </a:solidFill>
+                <a:latin typeface="Poppins"/>
+              </a:rPr>
+              <a:t>Université de Mostaganem — Dr. Madani BELACEL</a:t>
+            </a:r>
+          </a:p>
+        </p:txBody>
+      </p:sp>
     </p:spTree>
   </p:cSld>
   <p:clrMapOvr>
@@ -9651,9 +9988,7 @@
   <p:cSld>
     <p:bg>
       <p:bgPr>
-        <a:solidFill>
-          <a:srgbClr val="0B3D2E"/>
-        </a:solidFill>
+        <a:solidFill>val="004A38"/&gt;</a:solidFill>
         <a:effectLst/>
       </p:bgPr>
     </p:bg>
@@ -9678,9 +10013,7 @@
           <a:prstGeom prst="rect">
             <a:avLst/>
           </a:prstGeom>
-          <a:solidFill>
-            <a:srgbClr val="146B4A"/>
-          </a:solidFill>
+          <a:solidFill>val="007A55"/&gt;</a:solidFill>
           <a:ln>
             <a:noFill/>
           </a:ln>
@@ -9722,9 +10055,7 @@
           <a:prstGeom prst="rect">
             <a:avLst/>
           </a:prstGeom>
-          <a:solidFill>
-            <a:srgbClr val="FFD700"/>
-          </a:solidFill>
+          <a:solidFill>val="F0B429"/&gt;</a:solidFill>
           <a:ln>
             <a:noFill/>
           </a:ln>
@@ -9766,9 +10097,7 @@
           <a:prstGeom prst="rect">
             <a:avLst/>
           </a:prstGeom>
-          <a:solidFill>
-            <a:srgbClr val="FFD700"/>
-          </a:solidFill>
+          <a:solidFill>val="F0B429"/&gt;</a:solidFill>
           <a:ln>
             <a:noFill/>
           </a:ln>
@@ -9810,9 +10139,7 @@
           <a:prstGeom prst="rect">
             <a:avLst/>
           </a:prstGeom>
-          <a:solidFill>
-            <a:srgbClr val="146B4A"/>
-          </a:solidFill>
+          <a:solidFill>val="007A55"/&gt;</a:solidFill>
           <a:ln>
             <a:noFill/>
           </a:ln>
@@ -9865,10 +10192,8 @@
             <a:pPr algn="l"/>
             <a:r>
               <a:rPr sz="2400" b="1" i="0">
-                <a:solidFill>
-                  <a:srgbClr val="FFD700"/>
-                </a:solidFill>
-                <a:latin typeface="Calibri"/>
+                <a:solidFill>val="F0B429"/&gt;</a:solidFill>
+                <a:latin typeface="Poppins"/>
               </a:rPr>
               <a:t>2 - Concepts fondamentaux</a:t>
             </a:r>
@@ -9889,9 +10214,7 @@
           <a:prstGeom prst="rect">
             <a:avLst/>
           </a:prstGeom>
-          <a:solidFill>
-            <a:srgbClr val="146B4A"/>
-          </a:solidFill>
+          <a:solidFill>val="007A55"/&gt;</a:solidFill>
           <a:ln>
             <a:noFill/>
           </a:ln>
@@ -9948,10 +10271,8 @@
             </a:pPr>
             <a:r>
               <a:rPr sz="1800">
-                <a:solidFill>
-                  <a:srgbClr val="FFFFFF"/>
-                </a:solidFill>
-                <a:latin typeface="Calibri"/>
+                <a:solidFill>val="FFFFFF"/&gt;</a:solidFill>
+                <a:latin typeface="Poppins"/>
               </a:rPr>
               <a:t>▪  Site web : ensemble de pages reliées par des liens hypertextes.</a:t>
             </a:r>
@@ -9964,10 +10285,8 @@
             </a:pPr>
             <a:r>
               <a:rPr sz="1800">
-                <a:solidFill>
-                  <a:srgbClr val="FFFFFF"/>
-                </a:solidFill>
-                <a:latin typeface="Calibri"/>
+                <a:solidFill>val="FFFFFF"/&gt;</a:solidFill>
+                <a:latin typeface="Poppins"/>
               </a:rPr>
               <a:t>▪  URL : adresse d'une ressource (protocole://domaine/chemin).</a:t>
             </a:r>
@@ -9980,10 +10299,8 @@
             </a:pPr>
             <a:r>
               <a:rPr sz="1800">
-                <a:solidFill>
-                  <a:srgbClr val="FFFFFF"/>
-                </a:solidFill>
-                <a:latin typeface="Calibri"/>
+                <a:solidFill>val="FFFFFF"/&gt;</a:solidFill>
+                <a:latin typeface="Poppins"/>
               </a:rPr>
               <a:t>▪  HTTP/HTTPS : protocole de transfert des pages web.</a:t>
             </a:r>
@@ -9996,10 +10313,8 @@
             </a:pPr>
             <a:r>
               <a:rPr sz="1800">
-                <a:solidFill>
-                  <a:srgbClr val="FFFFFF"/>
-                </a:solidFill>
-                <a:latin typeface="Calibri"/>
+                <a:solidFill>val="FFFFFF"/&gt;</a:solidFill>
+                <a:latin typeface="Poppins"/>
               </a:rPr>
               <a:t>▪  Client (navigateur) / serveur web : modèle requête-réponse.</a:t>
             </a:r>
@@ -10030,6 +10345,47 @@
           </a:prstGeom>
         </p:spPr>
       </p:pic>
+      <p:sp>
+        <p:nvSpPr>
+          <p:cNvPr id="990001" name="Pied de page FLE"/>
+          <p:cNvSpPr>
+            <a:spLocks noGrp="1"/>
+          </p:cNvSpPr>
+          <p:nvPr/>
+        </p:nvSpPr>
+        <p:spPr>
+          <a:xfrm>
+            <a:off x="4343400" y="-329184"/>
+            <a:ext cx="4572000" cy="274320"/>
+          </a:xfrm>
+          <a:prstGeom prst="rect">
+            <a:avLst/>
+          </a:prstGeom>
+        </p:spPr>
+        <p:txBody>
+          <a:bodyPr anchor="b"/>
+          <a:lstStyle/>
+          <a:p>
+            <a:pPr algn="r">
+              <a:defRPr sz="900">
+                <a:solidFill>
+                  <a:srgbClr val="9AA7B6"/>
+                </a:solidFill>
+                <a:latin typeface="Poppins"/>
+              </a:defRPr>
+            </a:pPr>
+            <a:r>
+              <a:rPr lang="fr-FR" sz="900">
+                <a:solidFill>
+                  <a:srgbClr val="9AA7B6"/>
+                </a:solidFill>
+                <a:latin typeface="Poppins"/>
+              </a:rPr>
+              <a:t>Université de Mostaganem — Dr. Madani BELACEL</a:t>
+            </a:r>
+          </a:p>
+        </p:txBody>
+      </p:sp>
     </p:spTree>
   </p:cSld>
   <p:clrMapOvr>
@@ -10043,9 +10399,7 @@
   <p:cSld>
     <p:bg>
       <p:bgPr>
-        <a:solidFill>
-          <a:srgbClr val="0B3D2E"/>
-        </a:solidFill>
+        <a:solidFill>val="004A38"/&gt;</a:solidFill>
         <a:effectLst/>
       </p:bgPr>
     </p:bg>
@@ -10070,9 +10424,7 @@
           <a:prstGeom prst="rect">
             <a:avLst/>
           </a:prstGeom>
-          <a:solidFill>
-            <a:srgbClr val="146B4A"/>
-          </a:solidFill>
+          <a:solidFill>val="007A55"/&gt;</a:solidFill>
           <a:ln>
             <a:noFill/>
           </a:ln>
@@ -10114,9 +10466,7 @@
           <a:prstGeom prst="rect">
             <a:avLst/>
           </a:prstGeom>
-          <a:solidFill>
-            <a:srgbClr val="FFD700"/>
-          </a:solidFill>
+          <a:solidFill>val="F0B429"/&gt;</a:solidFill>
           <a:ln>
             <a:noFill/>
           </a:ln>
@@ -10158,9 +10508,7 @@
           <a:prstGeom prst="rect">
             <a:avLst/>
           </a:prstGeom>
-          <a:solidFill>
-            <a:srgbClr val="FFD700"/>
-          </a:solidFill>
+          <a:solidFill>val="F0B429"/&gt;</a:solidFill>
           <a:ln>
             <a:noFill/>
           </a:ln>
@@ -10202,9 +10550,7 @@
           <a:prstGeom prst="rect">
             <a:avLst/>
           </a:prstGeom>
-          <a:solidFill>
-            <a:srgbClr val="146B4A"/>
-          </a:solidFill>
+          <a:solidFill>val="007A55"/&gt;</a:solidFill>
           <a:ln>
             <a:noFill/>
           </a:ln>
@@ -10246,9 +10592,7 @@
           <a:prstGeom prst="rect">
             <a:avLst/>
           </a:prstGeom>
-          <a:solidFill>
-            <a:srgbClr val="146B4A"/>
-          </a:solidFill>
+          <a:solidFill>val="007A55"/&gt;</a:solidFill>
           <a:ln>
             <a:noFill/>
           </a:ln>
@@ -10301,10 +10645,8 @@
             <a:pPr algn="ctr"/>
             <a:r>
               <a:rPr sz="2200" b="1" i="0">
-                <a:solidFill>
-                  <a:srgbClr val="BBBBBB"/>
-                </a:solidFill>
-                <a:latin typeface="Calibri"/>
+                <a:solidFill>val="9AA7B6"/&gt;</a:solidFill>
+                <a:latin typeface="Poppins"/>
               </a:rPr>
               <a:t>Section 3</a:t>
             </a:r>
@@ -10336,10 +10678,8 @@
             <a:pPr algn="ctr"/>
             <a:r>
               <a:rPr sz="2800" b="1" i="0">
-                <a:solidFill>
-                  <a:srgbClr val="FFD700"/>
-                </a:solidFill>
-                <a:latin typeface="Calibri"/>
+                <a:solidFill>val="F0B429"/&gt;</a:solidFill>
+                <a:latin typeface="Poppins"/>
               </a:rPr>
               <a:t>Langages du Web</a:t>
             </a:r>
@@ -10370,6 +10710,47 @@
           </a:prstGeom>
         </p:spPr>
       </p:pic>
+      <p:sp>
+        <p:nvSpPr>
+          <p:cNvPr id="990001" name="Pied de page FLE"/>
+          <p:cNvSpPr>
+            <a:spLocks noGrp="1"/>
+          </p:cNvSpPr>
+          <p:nvPr/>
+        </p:nvSpPr>
+        <p:spPr>
+          <a:xfrm>
+            <a:off x="4343400" y="-329184"/>
+            <a:ext cx="4572000" cy="274320"/>
+          </a:xfrm>
+          <a:prstGeom prst="rect">
+            <a:avLst/>
+          </a:prstGeom>
+        </p:spPr>
+        <p:txBody>
+          <a:bodyPr anchor="b"/>
+          <a:lstStyle/>
+          <a:p>
+            <a:pPr algn="r">
+              <a:defRPr sz="900">
+                <a:solidFill>
+                  <a:srgbClr val="9AA7B6"/>
+                </a:solidFill>
+                <a:latin typeface="Poppins"/>
+              </a:defRPr>
+            </a:pPr>
+            <a:r>
+              <a:rPr lang="fr-FR" sz="900">
+                <a:solidFill>
+                  <a:srgbClr val="9AA7B6"/>
+                </a:solidFill>
+                <a:latin typeface="Poppins"/>
+              </a:rPr>
+              <a:t>Université de Mostaganem — Dr. Madani BELACEL</a:t>
+            </a:r>
+          </a:p>
+        </p:txBody>
+      </p:sp>
     </p:spTree>
   </p:cSld>
   <p:clrMapOvr>
@@ -10383,9 +10764,7 @@
   <p:cSld>
     <p:bg>
       <p:bgPr>
-        <a:solidFill>
-          <a:srgbClr val="0B3D2E"/>
-        </a:solidFill>
+        <a:solidFill>val="004A38"/&gt;</a:solidFill>
         <a:effectLst/>
       </p:bgPr>
     </p:bg>
@@ -10410,9 +10789,7 @@
           <a:prstGeom prst="rect">
             <a:avLst/>
           </a:prstGeom>
-          <a:solidFill>
-            <a:srgbClr val="146B4A"/>
-          </a:solidFill>
+          <a:solidFill>val="007A55"/&gt;</a:solidFill>
           <a:ln>
             <a:noFill/>
           </a:ln>
@@ -10454,9 +10831,7 @@
           <a:prstGeom prst="rect">
             <a:avLst/>
           </a:prstGeom>
-          <a:solidFill>
-            <a:srgbClr val="FFD700"/>
-          </a:solidFill>
+          <a:solidFill>val="F0B429"/&gt;</a:solidFill>
           <a:ln>
             <a:noFill/>
           </a:ln>
@@ -10498,9 +10873,7 @@
           <a:prstGeom prst="rect">
             <a:avLst/>
           </a:prstGeom>
-          <a:solidFill>
-            <a:srgbClr val="FFD700"/>
-          </a:solidFill>
+          <a:solidFill>val="F0B429"/&gt;</a:solidFill>
           <a:ln>
             <a:noFill/>
           </a:ln>
@@ -10542,9 +10915,7 @@
           <a:prstGeom prst="rect">
             <a:avLst/>
           </a:prstGeom>
-          <a:solidFill>
-            <a:srgbClr val="146B4A"/>
-          </a:solidFill>
+          <a:solidFill>val="007A55"/&gt;</a:solidFill>
           <a:ln>
             <a:noFill/>
           </a:ln>
@@ -10597,10 +10968,8 @@
             <a:pPr algn="l"/>
             <a:r>
               <a:rPr sz="2400" b="1" i="0">
-                <a:solidFill>
-                  <a:srgbClr val="FFD700"/>
-                </a:solidFill>
-                <a:latin typeface="Calibri"/>
+                <a:solidFill>val="F0B429"/&gt;</a:solidFill>
+                <a:latin typeface="Poppins"/>
               </a:rPr>
               <a:t>3 - Langages du Web</a:t>
             </a:r>
@@ -10621,9 +10990,7 @@
           <a:prstGeom prst="rect">
             <a:avLst/>
           </a:prstGeom>
-          <a:solidFill>
-            <a:srgbClr val="146B4A"/>
-          </a:solidFill>
+          <a:solidFill>val="007A55"/&gt;</a:solidFill>
           <a:ln>
             <a:noFill/>
           </a:ln>
@@ -10680,10 +11047,8 @@
             </a:pPr>
             <a:r>
               <a:rPr sz="1800">
-                <a:solidFill>
-                  <a:srgbClr val="FFFFFF"/>
-                </a:solidFill>
-                <a:latin typeface="Calibri"/>
+                <a:solidFill>val="FFFFFF"/&gt;</a:solidFill>
+                <a:latin typeface="Poppins"/>
               </a:rPr>
               <a:t>▪  HTML : structure et contenu des pages.</a:t>
             </a:r>
@@ -10696,10 +11061,8 @@
             </a:pPr>
             <a:r>
               <a:rPr sz="1800">
-                <a:solidFill>
-                  <a:srgbClr val="FFFFFF"/>
-                </a:solidFill>
-                <a:latin typeface="Calibri"/>
+                <a:solidFill>val="FFFFFF"/&gt;</a:solidFill>
+                <a:latin typeface="Poppins"/>
               </a:rPr>
               <a:t>▪  CSS : mise en forme et style visuel.</a:t>
             </a:r>
@@ -10712,10 +11075,8 @@
             </a:pPr>
             <a:r>
               <a:rPr sz="1800">
-                <a:solidFill>
-                  <a:srgbClr val="FFFFFF"/>
-                </a:solidFill>
-                <a:latin typeface="Calibri"/>
+                <a:solidFill>val="FFFFFF"/&gt;</a:solidFill>
+                <a:latin typeface="Poppins"/>
               </a:rPr>
               <a:t>▪  JavaScript : interactivité côté navigateur.</a:t>
             </a:r>
@@ -10728,10 +11089,8 @@
             </a:pPr>
             <a:r>
               <a:rPr sz="1800">
-                <a:solidFill>
-                  <a:srgbClr val="FFFFFF"/>
-                </a:solidFill>
-                <a:latin typeface="Calibri"/>
+                <a:solidFill>val="FFFFFF"/&gt;</a:solidFill>
+                <a:latin typeface="Poppins"/>
               </a:rPr>
               <a:t>▪  PHP, Python, ASP.NET : programmation côté serveur.</a:t>
             </a:r>
@@ -10762,6 +11121,47 @@
           </a:prstGeom>
         </p:spPr>
       </p:pic>
+      <p:sp>
+        <p:nvSpPr>
+          <p:cNvPr id="990001" name="Pied de page FLE"/>
+          <p:cNvSpPr>
+            <a:spLocks noGrp="1"/>
+          </p:cNvSpPr>
+          <p:nvPr/>
+        </p:nvSpPr>
+        <p:spPr>
+          <a:xfrm>
+            <a:off x="4343400" y="-329184"/>
+            <a:ext cx="4572000" cy="274320"/>
+          </a:xfrm>
+          <a:prstGeom prst="rect">
+            <a:avLst/>
+          </a:prstGeom>
+        </p:spPr>
+        <p:txBody>
+          <a:bodyPr anchor="b"/>
+          <a:lstStyle/>
+          <a:p>
+            <a:pPr algn="r">
+              <a:defRPr sz="900">
+                <a:solidFill>
+                  <a:srgbClr val="9AA7B6"/>
+                </a:solidFill>
+                <a:latin typeface="Poppins"/>
+              </a:defRPr>
+            </a:pPr>
+            <a:r>
+              <a:rPr lang="fr-FR" sz="900">
+                <a:solidFill>
+                  <a:srgbClr val="9AA7B6"/>
+                </a:solidFill>
+                <a:latin typeface="Poppins"/>
+              </a:rPr>
+              <a:t>Université de Mostaganem — Dr. Madani BELACEL</a:t>
+            </a:r>
+          </a:p>
+        </p:txBody>
+      </p:sp>
     </p:spTree>
   </p:cSld>
   <p:clrMapOvr>
@@ -10775,9 +11175,7 @@
   <p:cSld>
     <p:bg>
       <p:bgPr>
-        <a:solidFill>
-          <a:srgbClr val="0B3D2E"/>
-        </a:solidFill>
+        <a:solidFill>val="004A38"/&gt;</a:solidFill>
         <a:effectLst/>
       </p:bgPr>
     </p:bg>
@@ -10802,9 +11200,7 @@
           <a:prstGeom prst="rect">
             <a:avLst/>
           </a:prstGeom>
-          <a:solidFill>
-            <a:srgbClr val="146B4A"/>
-          </a:solidFill>
+          <a:solidFill>val="007A55"/&gt;</a:solidFill>
           <a:ln>
             <a:noFill/>
           </a:ln>
@@ -10846,9 +11242,7 @@
           <a:prstGeom prst="rect">
             <a:avLst/>
           </a:prstGeom>
-          <a:solidFill>
-            <a:srgbClr val="FFD700"/>
-          </a:solidFill>
+          <a:solidFill>val="F0B429"/&gt;</a:solidFill>
           <a:ln>
             <a:noFill/>
           </a:ln>
@@ -10890,9 +11284,7 @@
           <a:prstGeom prst="rect">
             <a:avLst/>
           </a:prstGeom>
-          <a:solidFill>
-            <a:srgbClr val="FFD700"/>
-          </a:solidFill>
+          <a:solidFill>val="F0B429"/&gt;</a:solidFill>
           <a:ln>
             <a:noFill/>
           </a:ln>
@@ -10934,9 +11326,7 @@
           <a:prstGeom prst="rect">
             <a:avLst/>
           </a:prstGeom>
-          <a:solidFill>
-            <a:srgbClr val="146B4A"/>
-          </a:solidFill>
+          <a:solidFill>val="007A55"/&gt;</a:solidFill>
           <a:ln>
             <a:noFill/>
           </a:ln>
@@ -10978,9 +11368,7 @@
           <a:prstGeom prst="rect">
             <a:avLst/>
           </a:prstGeom>
-          <a:solidFill>
-            <a:srgbClr val="146B4A"/>
-          </a:solidFill>
+          <a:solidFill>val="007A55"/&gt;</a:solidFill>
           <a:ln>
             <a:noFill/>
           </a:ln>
@@ -11033,10 +11421,8 @@
             <a:pPr algn="ctr"/>
             <a:r>
               <a:rPr sz="2200" b="1" i="0">
-                <a:solidFill>
-                  <a:srgbClr val="BBBBBB"/>
-                </a:solidFill>
-                <a:latin typeface="Calibri"/>
+                <a:solidFill>val="9AA7B6"/&gt;</a:solidFill>
+                <a:latin typeface="Poppins"/>
               </a:rPr>
               <a:t>Section 4</a:t>
             </a:r>
@@ -11068,10 +11454,8 @@
             <a:pPr algn="ctr"/>
             <a:r>
               <a:rPr sz="2800" b="1" i="0">
-                <a:solidFill>
-                  <a:srgbClr val="FFD700"/>
-                </a:solidFill>
-                <a:latin typeface="Calibri"/>
+                <a:solidFill>val="F0B429"/&gt;</a:solidFill>
+                <a:latin typeface="Poppins"/>
               </a:rPr>
               <a:t>Hébergement et publication</a:t>
             </a:r>
@@ -11102,6 +11486,47 @@
           </a:prstGeom>
         </p:spPr>
       </p:pic>
+      <p:sp>
+        <p:nvSpPr>
+          <p:cNvPr id="990001" name="Pied de page FLE"/>
+          <p:cNvSpPr>
+            <a:spLocks noGrp="1"/>
+          </p:cNvSpPr>
+          <p:nvPr/>
+        </p:nvSpPr>
+        <p:spPr>
+          <a:xfrm>
+            <a:off x="4343400" y="-329184"/>
+            <a:ext cx="4572000" cy="274320"/>
+          </a:xfrm>
+          <a:prstGeom prst="rect">
+            <a:avLst/>
+          </a:prstGeom>
+        </p:spPr>
+        <p:txBody>
+          <a:bodyPr anchor="b"/>
+          <a:lstStyle/>
+          <a:p>
+            <a:pPr algn="r">
+              <a:defRPr sz="900">
+                <a:solidFill>
+                  <a:srgbClr val="9AA7B6"/>
+                </a:solidFill>
+                <a:latin typeface="Poppins"/>
+              </a:defRPr>
+            </a:pPr>
+            <a:r>
+              <a:rPr lang="fr-FR" sz="900">
+                <a:solidFill>
+                  <a:srgbClr val="9AA7B6"/>
+                </a:solidFill>
+                <a:latin typeface="Poppins"/>
+              </a:rPr>
+              <a:t>Université de Mostaganem — Dr. Madani BELACEL</a:t>
+            </a:r>
+          </a:p>
+        </p:txBody>
+      </p:sp>
     </p:spTree>
   </p:cSld>
   <p:clrMapOvr>
@@ -11153,7 +11578,7 @@
     </a:clrScheme>
     <a:fontScheme name="Office">
       <a:majorFont>
-        <a:latin typeface="Calibri"/>
+        <a:latin typeface="Poppins"/>
         <a:ea typeface=""/>
         <a:cs typeface=""/>
         <a:font script="Jpan" typeface="ＭＳ Ｐゴシック"/>
@@ -11188,7 +11613,7 @@
         <a:font script="Geor" typeface="Sylfaen"/>
       </a:majorFont>
       <a:minorFont>
-        <a:latin typeface="Calibri"/>
+        <a:latin typeface="Poppins"/>
         <a:ea typeface=""/>
         <a:cs typeface=""/>
         <a:font script="Jpan" typeface="ＭＳ Ｐゴシック"/>
